--- a/public/lessons/year-6-maths/spring/week-16/convert-fractions-to-decimals/teaching-powerpoint-v1.pptx
+++ b/public/lessons/year-6-maths/spring/week-16/convert-fractions-to-decimals/teaching-powerpoint-v1.pptx
@@ -2,24 +2,24 @@
 <file path=ppt/presentation.xml><?xml version="1.0" encoding="utf-8"?>
 <p:presentation xmlns:p="http://schemas.openxmlformats.org/presentationml/2006/main">
   <p:sldMasterIdLst>
-    <p:sldMasterId xmlns:r="http://schemas.openxmlformats.org/officeDocument/2006/relationships" id="2147483648" r:id="Ra5edabdd4bea49e9"/>
+    <p:sldMasterId xmlns:r="http://schemas.openxmlformats.org/officeDocument/2006/relationships" id="2147483648" r:id="R42e57921f17c4477"/>
   </p:sldMasterIdLst>
   <p:notesMasterIdLst>
-    <p:notesMasterId xmlns:r="http://schemas.openxmlformats.org/officeDocument/2006/relationships" r:id="R5a52e5f7b6b84643"/>
+    <p:notesMasterId xmlns:r="http://schemas.openxmlformats.org/officeDocument/2006/relationships" r:id="R853bf4e6ade64267"/>
   </p:notesMasterIdLst>
   <p:sldIdLst>
-    <p:sldId xmlns:r="http://schemas.openxmlformats.org/officeDocument/2006/relationships" id="256" r:id="R4535e65683c44753"/>
-    <p:sldId xmlns:r="http://schemas.openxmlformats.org/officeDocument/2006/relationships" id="257" r:id="R9c9017bdf7124e19"/>
-    <p:sldId xmlns:r="http://schemas.openxmlformats.org/officeDocument/2006/relationships" id="258" r:id="R27a83e3a5b354d6c"/>
-    <p:sldId xmlns:r="http://schemas.openxmlformats.org/officeDocument/2006/relationships" id="259" r:id="Rd1d7642004904d81"/>
-    <p:sldId xmlns:r="http://schemas.openxmlformats.org/officeDocument/2006/relationships" id="260" r:id="Rab1542b7e8704554"/>
-    <p:sldId xmlns:r="http://schemas.openxmlformats.org/officeDocument/2006/relationships" id="261" r:id="R5a41eee9627d4a78"/>
-    <p:sldId xmlns:r="http://schemas.openxmlformats.org/officeDocument/2006/relationships" id="262" r:id="R6581626872ad49e2"/>
-    <p:sldId xmlns:r="http://schemas.openxmlformats.org/officeDocument/2006/relationships" id="263" r:id="R943f38f0a3f74de6"/>
-    <p:sldId xmlns:r="http://schemas.openxmlformats.org/officeDocument/2006/relationships" id="264" r:id="R8c43112e7e2b4775"/>
-    <p:sldId xmlns:r="http://schemas.openxmlformats.org/officeDocument/2006/relationships" id="265" r:id="R2238d52b4c60476b"/>
-    <p:sldId xmlns:r="http://schemas.openxmlformats.org/officeDocument/2006/relationships" id="266" r:id="R1a79969eed324ab8"/>
-    <p:sldId xmlns:r="http://schemas.openxmlformats.org/officeDocument/2006/relationships" id="267" r:id="Rf6fadbbe112a447f"/>
+    <p:sldId xmlns:r="http://schemas.openxmlformats.org/officeDocument/2006/relationships" id="256" r:id="Ra34a9b9674394060"/>
+    <p:sldId xmlns:r="http://schemas.openxmlformats.org/officeDocument/2006/relationships" id="257" r:id="R58b23032aa654247"/>
+    <p:sldId xmlns:r="http://schemas.openxmlformats.org/officeDocument/2006/relationships" id="258" r:id="R6011f2eae2ad4be2"/>
+    <p:sldId xmlns:r="http://schemas.openxmlformats.org/officeDocument/2006/relationships" id="259" r:id="Raf7f8d150aa54399"/>
+    <p:sldId xmlns:r="http://schemas.openxmlformats.org/officeDocument/2006/relationships" id="260" r:id="R746792706c3b4470"/>
+    <p:sldId xmlns:r="http://schemas.openxmlformats.org/officeDocument/2006/relationships" id="261" r:id="Rcb80490b08aa48ed"/>
+    <p:sldId xmlns:r="http://schemas.openxmlformats.org/officeDocument/2006/relationships" id="262" r:id="R34d20a8604074e6d"/>
+    <p:sldId xmlns:r="http://schemas.openxmlformats.org/officeDocument/2006/relationships" id="263" r:id="R580c68f42f1d4119"/>
+    <p:sldId xmlns:r="http://schemas.openxmlformats.org/officeDocument/2006/relationships" id="264" r:id="R66ca8fc711d4497f"/>
+    <p:sldId xmlns:r="http://schemas.openxmlformats.org/officeDocument/2006/relationships" id="265" r:id="R7cfae5ae21a74e5c"/>
+    <p:sldId xmlns:r="http://schemas.openxmlformats.org/officeDocument/2006/relationships" id="266" r:id="R926a28c79a7740ff"/>
+    <p:sldId xmlns:r="http://schemas.openxmlformats.org/officeDocument/2006/relationships" id="267" r:id="R137c281cbebd4d62"/>
   </p:sldIdLst>
   <p:sldSz cx="12192000" cy="6858000"/>
   <p:notesSz cx="6858000" cy="9144000"/>
@@ -873,7 +873,7 @@
           <a:lstStyle xmlns:a="http://schemas.openxmlformats.org/drawingml/2006/main"/>
           <a:p xmlns:a="http://schemas.openxmlformats.org/drawingml/2006/main">
             <a:r>
-              <a:t>I do. Reveal the question, setup and each calculation stage one click at a time. Pupils watch before copying. Model answer: 0.35.</a:t>
+              <a:t>I do. Reveal the question, then reveal each mathematical change one click at a time. Point to the numbers and operation that changed before moving to the next line. Final answer: 0.35.</a:t>
             </a:r>
           </a:p>
         </p:txBody>
@@ -1291,7 +1291,7 @@
   </p:cSld>
   <p:clrMap bg1="lt1" tx1="dk1" bg2="lt2" tx2="dk2" accent1="accent1" accent2="accent2" accent3="accent3" accent4="accent4" accent5="accent5" accent6="accent6" hlink="hlink" folHlink="folHlink"/>
   <p:sldLayoutIdLst>
-    <p:sldLayoutId xmlns:r="http://schemas.openxmlformats.org/officeDocument/2006/relationships" id="2147483649" r:id="R84c5ce182d4846f5"/>
+    <p:sldLayoutId xmlns:r="http://schemas.openxmlformats.org/officeDocument/2006/relationships" id="2147483649" r:id="R2a7c5e6edef74626"/>
   </p:sldLayoutIdLst>
   <p:txStyles>
     <p:titleStyle>
@@ -1842,7 +1842,7 @@
           <p:cNvPr id="12" name="">
             <a:extLst xmlns:a="http://schemas.openxmlformats.org/drawingml/2006/main">
               <a:ext uri="{FF2B5EF4-FFF2-40B4-BE49-F238E27FC236}">
-                <a16:creationId xmlns:a16="http://schemas.microsoft.com/office/drawing/2014/main" id="{89EB6CFF-4405-4BB6-9693-5B77CC7A8435}"/>
+                <a16:creationId xmlns:a16="http://schemas.microsoft.com/office/drawing/2014/main" id="{249AAF9D-15F7-4B49-A244-DC273152DEAC}"/>
               </a:ext>
             </a:extLst>
           </p:cNvPr>
@@ -1874,7 +1874,7 @@
           <p:cNvPr id="2" name="">
             <a:extLst xmlns:a="http://schemas.openxmlformats.org/drawingml/2006/main">
               <a:ext uri="{FF2B5EF4-FFF2-40B4-BE49-F238E27FC236}">
-                <a16:creationId xmlns:a16="http://schemas.microsoft.com/office/drawing/2014/main" id="{C7C8DA25-C6AE-48F3-8E1B-6AC506C85408}"/>
+                <a16:creationId xmlns:a16="http://schemas.microsoft.com/office/drawing/2014/main" id="{410E51B6-E645-42DA-8C9E-2B557C90BAA7}"/>
               </a:ext>
             </a:extLst>
           </p:cNvPr>
@@ -1931,7 +1931,7 @@
           <p:cNvPr id="3" name="">
             <a:extLst xmlns:a="http://schemas.openxmlformats.org/drawingml/2006/main">
               <a:ext uri="{FF2B5EF4-FFF2-40B4-BE49-F238E27FC236}">
-                <a16:creationId xmlns:a16="http://schemas.microsoft.com/office/drawing/2014/main" id="{12E96C55-03EC-4E79-A7A3-CB023BBE7F78}"/>
+                <a16:creationId xmlns:a16="http://schemas.microsoft.com/office/drawing/2014/main" id="{2AAE6C2A-2EBC-4EFC-92BF-561A9747EC3F}"/>
               </a:ext>
             </a:extLst>
           </p:cNvPr>
@@ -1965,7 +1965,7 @@
           <p:cNvPr id="4" name="">
             <a:extLst xmlns:a="http://schemas.openxmlformats.org/drawingml/2006/main">
               <a:ext uri="{FF2B5EF4-FFF2-40B4-BE49-F238E27FC236}">
-                <a16:creationId xmlns:a16="http://schemas.microsoft.com/office/drawing/2014/main" id="{BDBACBD1-FF26-4CC7-BB57-A314303740E8}"/>
+                <a16:creationId xmlns:a16="http://schemas.microsoft.com/office/drawing/2014/main" id="{F00A2050-0302-4194-A4B8-3277A18B0E0D}"/>
               </a:ext>
             </a:extLst>
           </p:cNvPr>
@@ -2022,7 +2022,7 @@
           <p:cNvPr id="5" name="">
             <a:extLst xmlns:a="http://schemas.openxmlformats.org/drawingml/2006/main">
               <a:ext uri="{FF2B5EF4-FFF2-40B4-BE49-F238E27FC236}">
-                <a16:creationId xmlns:a16="http://schemas.microsoft.com/office/drawing/2014/main" id="{B0C5738E-F2B6-447A-A9B8-E7E41A5AEBC6}"/>
+                <a16:creationId xmlns:a16="http://schemas.microsoft.com/office/drawing/2014/main" id="{A84C41F6-F123-4606-84AC-A91E0AC0FB8A}"/>
               </a:ext>
             </a:extLst>
           </p:cNvPr>
@@ -2079,7 +2079,7 @@
           <p:cNvPr id="6" name="">
             <a:extLst xmlns:a="http://schemas.openxmlformats.org/drawingml/2006/main">
               <a:ext uri="{FF2B5EF4-FFF2-40B4-BE49-F238E27FC236}">
-                <a16:creationId xmlns:a16="http://schemas.microsoft.com/office/drawing/2014/main" id="{6F3D9A84-DA76-4F78-B908-3542120F3B1A}"/>
+                <a16:creationId xmlns:a16="http://schemas.microsoft.com/office/drawing/2014/main" id="{D8BB7F82-D431-469E-BD6A-20355C0FAA9D}"/>
               </a:ext>
             </a:extLst>
           </p:cNvPr>
@@ -2113,7 +2113,7 @@
           <p:cNvPr id="7" name="">
             <a:extLst xmlns:a="http://schemas.openxmlformats.org/drawingml/2006/main">
               <a:ext uri="{FF2B5EF4-FFF2-40B4-BE49-F238E27FC236}">
-                <a16:creationId xmlns:a16="http://schemas.microsoft.com/office/drawing/2014/main" id="{7C1C0D75-DDB7-452B-A4EB-D7B107AFFF8B}"/>
+                <a16:creationId xmlns:a16="http://schemas.microsoft.com/office/drawing/2014/main" id="{C7A46728-508C-4E5D-9B53-51679A61317F}"/>
               </a:ext>
             </a:extLst>
           </p:cNvPr>
@@ -2170,7 +2170,7 @@
           <p:cNvPr id="8" name="">
             <a:extLst xmlns:a="http://schemas.openxmlformats.org/drawingml/2006/main">
               <a:ext uri="{FF2B5EF4-FFF2-40B4-BE49-F238E27FC236}">
-                <a16:creationId xmlns:a16="http://schemas.microsoft.com/office/drawing/2014/main" id="{26535EE2-6FC1-4321-84B1-BBC9D72645E2}"/>
+                <a16:creationId xmlns:a16="http://schemas.microsoft.com/office/drawing/2014/main" id="{681673AA-3D3A-4628-81FA-5B3BFDFBE967}"/>
               </a:ext>
             </a:extLst>
           </p:cNvPr>
@@ -2227,7 +2227,7 @@
           <p:cNvPr id="9" name="">
             <a:extLst xmlns:a="http://schemas.openxmlformats.org/drawingml/2006/main">
               <a:ext uri="{FF2B5EF4-FFF2-40B4-BE49-F238E27FC236}">
-                <a16:creationId xmlns:a16="http://schemas.microsoft.com/office/drawing/2014/main" id="{21AB3EC5-0A33-4C4D-A4CB-4CBC22FE5282}"/>
+                <a16:creationId xmlns:a16="http://schemas.microsoft.com/office/drawing/2014/main" id="{B2D615FE-C83F-4DEB-BBAC-453F68CC00E6}"/>
               </a:ext>
             </a:extLst>
           </p:cNvPr>
@@ -2284,7 +2284,7 @@
           <p:cNvPr id="10" name="">
             <a:extLst xmlns:a="http://schemas.openxmlformats.org/drawingml/2006/main">
               <a:ext uri="{FF2B5EF4-FFF2-40B4-BE49-F238E27FC236}">
-                <a16:creationId xmlns:a16="http://schemas.microsoft.com/office/drawing/2014/main" id="{D4266A96-D26C-4941-AD2F-FD1183B6F8DE}"/>
+                <a16:creationId xmlns:a16="http://schemas.microsoft.com/office/drawing/2014/main" id="{BE6225F8-2099-4F94-B0EA-FDE2567539D4}"/>
               </a:ext>
             </a:extLst>
           </p:cNvPr>
@@ -2341,7 +2341,7 @@
           <p:cNvPr id="11" name="">
             <a:extLst xmlns:a="http://schemas.openxmlformats.org/drawingml/2006/main">
               <a:ext uri="{FF2B5EF4-FFF2-40B4-BE49-F238E27FC236}">
-                <a16:creationId xmlns:a16="http://schemas.microsoft.com/office/drawing/2014/main" id="{3478EAF6-8E9C-41D0-8E3D-64864867E9FB}"/>
+                <a16:creationId xmlns:a16="http://schemas.microsoft.com/office/drawing/2014/main" id="{5FD54985-9DAD-4CC8-A8C4-E58D13E91D29}"/>
               </a:ext>
             </a:extLst>
           </p:cNvPr>
@@ -2396,7 +2396,7 @@
     </p:spTree>
     <p:extLst>
       <p:ext uri="{BB962C8B-B14F-4D97-AF65-F5344CB8AC3E}">
-        <p14:creationId xmlns:p14="http://schemas.microsoft.com/office/powerpoint/2010/main" val="1290625747"/>
+        <p14:creationId xmlns:p14="http://schemas.microsoft.com/office/powerpoint/2010/main" val="1073115785"/>
       </p:ext>
     </p:extLst>
   </p:cSld>
@@ -2427,7 +2427,7 @@
           <p:cNvPr id="14" name="">
             <a:extLst xmlns:a="http://schemas.openxmlformats.org/drawingml/2006/main">
               <a:ext uri="{FF2B5EF4-FFF2-40B4-BE49-F238E27FC236}">
-                <a16:creationId xmlns:a16="http://schemas.microsoft.com/office/drawing/2014/main" id="{231557C6-106F-4192-8378-17597568FDBA}"/>
+                <a16:creationId xmlns:a16="http://schemas.microsoft.com/office/drawing/2014/main" id="{31632871-00E2-49AF-A3BD-DCB622DEBDCC}"/>
               </a:ext>
             </a:extLst>
           </p:cNvPr>
@@ -2459,7 +2459,7 @@
           <p:cNvPr id="2" name="">
             <a:extLst xmlns:a="http://schemas.openxmlformats.org/drawingml/2006/main">
               <a:ext uri="{FF2B5EF4-FFF2-40B4-BE49-F238E27FC236}">
-                <a16:creationId xmlns:a16="http://schemas.microsoft.com/office/drawing/2014/main" id="{ACE5C856-6997-4F1D-AC19-DBC7C68FCB75}"/>
+                <a16:creationId xmlns:a16="http://schemas.microsoft.com/office/drawing/2014/main" id="{04095F24-D415-4DAA-923B-1976F7B1991D}"/>
               </a:ext>
             </a:extLst>
           </p:cNvPr>
@@ -2516,7 +2516,7 @@
           <p:cNvPr id="3" name="">
             <a:extLst xmlns:a="http://schemas.openxmlformats.org/drawingml/2006/main">
               <a:ext uri="{FF2B5EF4-FFF2-40B4-BE49-F238E27FC236}">
-                <a16:creationId xmlns:a16="http://schemas.microsoft.com/office/drawing/2014/main" id="{A14CC209-6902-48BC-BA98-06895B2DAE42}"/>
+                <a16:creationId xmlns:a16="http://schemas.microsoft.com/office/drawing/2014/main" id="{95FDBCF6-AD7A-4AB7-9E5F-BF78F5C6C52D}"/>
               </a:ext>
             </a:extLst>
           </p:cNvPr>
@@ -2548,7 +2548,7 @@
           <p:cNvPr id="4" name="">
             <a:extLst xmlns:a="http://schemas.openxmlformats.org/drawingml/2006/main">
               <a:ext uri="{FF2B5EF4-FFF2-40B4-BE49-F238E27FC236}">
-                <a16:creationId xmlns:a16="http://schemas.microsoft.com/office/drawing/2014/main" id="{91FE5329-918C-4D4D-96C6-506B4BD2E3ED}"/>
+                <a16:creationId xmlns:a16="http://schemas.microsoft.com/office/drawing/2014/main" id="{1AB70070-56E9-4670-B32E-1B2AA706F2AC}"/>
               </a:ext>
             </a:extLst>
           </p:cNvPr>
@@ -2605,7 +2605,7 @@
           <p:cNvPr id="5" name="">
             <a:extLst xmlns:a="http://schemas.openxmlformats.org/drawingml/2006/main">
               <a:ext uri="{FF2B5EF4-FFF2-40B4-BE49-F238E27FC236}">
-                <a16:creationId xmlns:a16="http://schemas.microsoft.com/office/drawing/2014/main" id="{EC2F3994-4F0A-4CB6-A102-1FA0C8313039}"/>
+                <a16:creationId xmlns:a16="http://schemas.microsoft.com/office/drawing/2014/main" id="{2CAF8D56-B0FB-46CC-98D5-54700E9C8FC4}"/>
               </a:ext>
             </a:extLst>
           </p:cNvPr>
@@ -2662,7 +2662,7 @@
           <p:cNvPr id="6" name="">
             <a:extLst xmlns:a="http://schemas.openxmlformats.org/drawingml/2006/main">
               <a:ext uri="{FF2B5EF4-FFF2-40B4-BE49-F238E27FC236}">
-                <a16:creationId xmlns:a16="http://schemas.microsoft.com/office/drawing/2014/main" id="{0A3641ED-A8C6-461F-A443-4773DDB6CE02}"/>
+                <a16:creationId xmlns:a16="http://schemas.microsoft.com/office/drawing/2014/main" id="{7B933BD1-25DD-4CE9-A794-D2B2117BFA54}"/>
               </a:ext>
             </a:extLst>
           </p:cNvPr>
@@ -2719,7 +2719,7 @@
           <p:cNvPr id="7" name="">
             <a:extLst xmlns:a="http://schemas.openxmlformats.org/drawingml/2006/main">
               <a:ext uri="{FF2B5EF4-FFF2-40B4-BE49-F238E27FC236}">
-                <a16:creationId xmlns:a16="http://schemas.microsoft.com/office/drawing/2014/main" id="{94B27238-CE51-4497-B870-87EE0A29C3A9}"/>
+                <a16:creationId xmlns:a16="http://schemas.microsoft.com/office/drawing/2014/main" id="{77C3F015-FB12-4BAD-A753-31E685C72D16}"/>
               </a:ext>
             </a:extLst>
           </p:cNvPr>
@@ -2751,7 +2751,7 @@
           <p:cNvPr id="8" name="">
             <a:extLst xmlns:a="http://schemas.openxmlformats.org/drawingml/2006/main">
               <a:ext uri="{FF2B5EF4-FFF2-40B4-BE49-F238E27FC236}">
-                <a16:creationId xmlns:a16="http://schemas.microsoft.com/office/drawing/2014/main" id="{828658CB-7A11-4B91-B703-2176AD4774BC}"/>
+                <a16:creationId xmlns:a16="http://schemas.microsoft.com/office/drawing/2014/main" id="{F478CEBF-5692-407F-AA50-F9995D6C7D46}"/>
               </a:ext>
             </a:extLst>
           </p:cNvPr>
@@ -2808,7 +2808,7 @@
           <p:cNvPr id="9" name="">
             <a:extLst xmlns:a="http://schemas.openxmlformats.org/drawingml/2006/main">
               <a:ext uri="{FF2B5EF4-FFF2-40B4-BE49-F238E27FC236}">
-                <a16:creationId xmlns:a16="http://schemas.microsoft.com/office/drawing/2014/main" id="{762B4603-6816-4B7A-951F-AC18B0CF9EFD}"/>
+                <a16:creationId xmlns:a16="http://schemas.microsoft.com/office/drawing/2014/main" id="{D64FB517-93F1-4365-8BBE-4E79DF8D1B5B}"/>
               </a:ext>
             </a:extLst>
           </p:cNvPr>
@@ -2865,7 +2865,7 @@
           <p:cNvPr id="10" name="">
             <a:extLst xmlns:a="http://schemas.openxmlformats.org/drawingml/2006/main">
               <a:ext uri="{FF2B5EF4-FFF2-40B4-BE49-F238E27FC236}">
-                <a16:creationId xmlns:a16="http://schemas.microsoft.com/office/drawing/2014/main" id="{74EB66CC-0E0F-4F4B-8704-398381F942F6}"/>
+                <a16:creationId xmlns:a16="http://schemas.microsoft.com/office/drawing/2014/main" id="{AED9659C-C8FB-4C4C-9A6C-D4554A624BA3}"/>
               </a:ext>
             </a:extLst>
           </p:cNvPr>
@@ -2922,7 +2922,7 @@
           <p:cNvPr id="11" name="">
             <a:extLst xmlns:a="http://schemas.openxmlformats.org/drawingml/2006/main">
               <a:ext uri="{FF2B5EF4-FFF2-40B4-BE49-F238E27FC236}">
-                <a16:creationId xmlns:a16="http://schemas.microsoft.com/office/drawing/2014/main" id="{0D4B4161-AD09-43B7-BA0A-8B8454116FB3}"/>
+                <a16:creationId xmlns:a16="http://schemas.microsoft.com/office/drawing/2014/main" id="{E7611067-F31E-460E-A7DC-5C0DC36C857D}"/>
               </a:ext>
             </a:extLst>
           </p:cNvPr>
@@ -2979,7 +2979,7 @@
           <p:cNvPr id="12" name="">
             <a:extLst xmlns:a="http://schemas.openxmlformats.org/drawingml/2006/main">
               <a:ext uri="{FF2B5EF4-FFF2-40B4-BE49-F238E27FC236}">
-                <a16:creationId xmlns:a16="http://schemas.microsoft.com/office/drawing/2014/main" id="{916A118F-D9E7-4BF6-B426-2E41215AB33E}"/>
+                <a16:creationId xmlns:a16="http://schemas.microsoft.com/office/drawing/2014/main" id="{B121CAE0-18A6-475A-8DC3-83DFC2747F48}"/>
               </a:ext>
             </a:extLst>
           </p:cNvPr>
@@ -3036,7 +3036,7 @@
           <p:cNvPr id="13" name="">
             <a:extLst xmlns:a="http://schemas.openxmlformats.org/drawingml/2006/main">
               <a:ext uri="{FF2B5EF4-FFF2-40B4-BE49-F238E27FC236}">
-                <a16:creationId xmlns:a16="http://schemas.microsoft.com/office/drawing/2014/main" id="{ADD8E4EB-0A3D-446C-BFA6-3C4424EE5FBA}"/>
+                <a16:creationId xmlns:a16="http://schemas.microsoft.com/office/drawing/2014/main" id="{9635AA45-41EC-419E-8ECE-5C4F141E11D4}"/>
               </a:ext>
             </a:extLst>
           </p:cNvPr>
@@ -3091,7 +3091,7 @@
     </p:spTree>
     <p:extLst>
       <p:ext uri="{BB962C8B-B14F-4D97-AF65-F5344CB8AC3E}">
-        <p14:creationId xmlns:p14="http://schemas.microsoft.com/office/powerpoint/2010/main" val="322723659"/>
+        <p14:creationId xmlns:p14="http://schemas.microsoft.com/office/powerpoint/2010/main" val="1670854310"/>
       </p:ext>
     </p:extLst>
   </p:cSld>
@@ -3292,7 +3292,7 @@
           <p:cNvPr id="19" name="">
             <a:extLst xmlns:a="http://schemas.openxmlformats.org/drawingml/2006/main">
               <a:ext uri="{FF2B5EF4-FFF2-40B4-BE49-F238E27FC236}">
-                <a16:creationId xmlns:a16="http://schemas.microsoft.com/office/drawing/2014/main" id="{4E8E112D-6FB5-4F1A-84E9-F5B503BF0D0A}"/>
+                <a16:creationId xmlns:a16="http://schemas.microsoft.com/office/drawing/2014/main" id="{564B6B57-B017-4B82-8166-C7EEA7534104}"/>
               </a:ext>
             </a:extLst>
           </p:cNvPr>
@@ -3324,7 +3324,7 @@
           <p:cNvPr id="2" name="">
             <a:extLst xmlns:a="http://schemas.openxmlformats.org/drawingml/2006/main">
               <a:ext uri="{FF2B5EF4-FFF2-40B4-BE49-F238E27FC236}">
-                <a16:creationId xmlns:a16="http://schemas.microsoft.com/office/drawing/2014/main" id="{44B96CDE-A7CB-4CC8-BCEF-79B381490A7C}"/>
+                <a16:creationId xmlns:a16="http://schemas.microsoft.com/office/drawing/2014/main" id="{BE3A54D7-6C0B-459E-9549-42F745FFF461}"/>
               </a:ext>
             </a:extLst>
           </p:cNvPr>
@@ -3381,7 +3381,7 @@
           <p:cNvPr id="3" name="">
             <a:extLst xmlns:a="http://schemas.openxmlformats.org/drawingml/2006/main">
               <a:ext uri="{FF2B5EF4-FFF2-40B4-BE49-F238E27FC236}">
-                <a16:creationId xmlns:a16="http://schemas.microsoft.com/office/drawing/2014/main" id="{FE268280-D6A9-4D07-B1DC-E26063CC78CD}"/>
+                <a16:creationId xmlns:a16="http://schemas.microsoft.com/office/drawing/2014/main" id="{8B4CE59A-35A5-4487-B981-48D9EC264FB1}"/>
               </a:ext>
             </a:extLst>
           </p:cNvPr>
@@ -3413,7 +3413,7 @@
           <p:cNvPr id="4" name="">
             <a:extLst xmlns:a="http://schemas.openxmlformats.org/drawingml/2006/main">
               <a:ext uri="{FF2B5EF4-FFF2-40B4-BE49-F238E27FC236}">
-                <a16:creationId xmlns:a16="http://schemas.microsoft.com/office/drawing/2014/main" id="{FA782562-E007-4685-8368-A741E631DD27}"/>
+                <a16:creationId xmlns:a16="http://schemas.microsoft.com/office/drawing/2014/main" id="{BD766F5B-7930-464D-9D98-22615D3E7F89}"/>
               </a:ext>
             </a:extLst>
           </p:cNvPr>
@@ -3470,7 +3470,7 @@
           <p:cNvPr id="5" name="">
             <a:extLst xmlns:a="http://schemas.openxmlformats.org/drawingml/2006/main">
               <a:ext uri="{FF2B5EF4-FFF2-40B4-BE49-F238E27FC236}">
-                <a16:creationId xmlns:a16="http://schemas.microsoft.com/office/drawing/2014/main" id="{3E6F730B-58A4-492E-B86C-66BADE43F633}"/>
+                <a16:creationId xmlns:a16="http://schemas.microsoft.com/office/drawing/2014/main" id="{8ED31C06-C69A-4AAF-8482-64DD0D01BE38}"/>
               </a:ext>
             </a:extLst>
           </p:cNvPr>
@@ -3527,7 +3527,7 @@
           <p:cNvPr id="6" name="">
             <a:extLst xmlns:a="http://schemas.openxmlformats.org/drawingml/2006/main">
               <a:ext uri="{FF2B5EF4-FFF2-40B4-BE49-F238E27FC236}">
-                <a16:creationId xmlns:a16="http://schemas.microsoft.com/office/drawing/2014/main" id="{59AD4189-C6D3-4C84-95AB-17C86E452C6B}"/>
+                <a16:creationId xmlns:a16="http://schemas.microsoft.com/office/drawing/2014/main" id="{8F11E98D-3E02-4648-83B2-EF8ABD4624D0}"/>
               </a:ext>
             </a:extLst>
           </p:cNvPr>
@@ -3584,7 +3584,7 @@
           <p:cNvPr id="7" name="">
             <a:extLst xmlns:a="http://schemas.openxmlformats.org/drawingml/2006/main">
               <a:ext uri="{FF2B5EF4-FFF2-40B4-BE49-F238E27FC236}">
-                <a16:creationId xmlns:a16="http://schemas.microsoft.com/office/drawing/2014/main" id="{D81CA191-7094-4E56-A63D-8059708FAEE1}"/>
+                <a16:creationId xmlns:a16="http://schemas.microsoft.com/office/drawing/2014/main" id="{392713DD-2457-41FC-AEF6-7BACF40A7847}"/>
               </a:ext>
             </a:extLst>
           </p:cNvPr>
@@ -3616,7 +3616,7 @@
           <p:cNvPr id="8" name="">
             <a:extLst xmlns:a="http://schemas.openxmlformats.org/drawingml/2006/main">
               <a:ext uri="{FF2B5EF4-FFF2-40B4-BE49-F238E27FC236}">
-                <a16:creationId xmlns:a16="http://schemas.microsoft.com/office/drawing/2014/main" id="{24EEBD0C-7BEA-4F7B-99DD-8E970EE270C0}"/>
+                <a16:creationId xmlns:a16="http://schemas.microsoft.com/office/drawing/2014/main" id="{0728C08C-48C1-4074-B434-AAAD7106C1F2}"/>
               </a:ext>
             </a:extLst>
           </p:cNvPr>
@@ -3673,7 +3673,7 @@
           <p:cNvPr id="9" name="">
             <a:extLst xmlns:a="http://schemas.openxmlformats.org/drawingml/2006/main">
               <a:ext uri="{FF2B5EF4-FFF2-40B4-BE49-F238E27FC236}">
-                <a16:creationId xmlns:a16="http://schemas.microsoft.com/office/drawing/2014/main" id="{F9994205-37DF-4859-AB11-306EE9E79C8B}"/>
+                <a16:creationId xmlns:a16="http://schemas.microsoft.com/office/drawing/2014/main" id="{CB16DE6E-9C43-430D-8078-14E43B9D3B91}"/>
               </a:ext>
             </a:extLst>
           </p:cNvPr>
@@ -3730,7 +3730,7 @@
           <p:cNvPr id="10" name="">
             <a:extLst xmlns:a="http://schemas.openxmlformats.org/drawingml/2006/main">
               <a:ext uri="{FF2B5EF4-FFF2-40B4-BE49-F238E27FC236}">
-                <a16:creationId xmlns:a16="http://schemas.microsoft.com/office/drawing/2014/main" id="{17AE1FEE-5EC3-48E6-843A-AA43E51C07A1}"/>
+                <a16:creationId xmlns:a16="http://schemas.microsoft.com/office/drawing/2014/main" id="{7B617ABA-3374-4BEF-9414-84DFBA037D63}"/>
               </a:ext>
             </a:extLst>
           </p:cNvPr>
@@ -3787,7 +3787,7 @@
           <p:cNvPr id="11" name="">
             <a:extLst xmlns:a="http://schemas.openxmlformats.org/drawingml/2006/main">
               <a:ext uri="{FF2B5EF4-FFF2-40B4-BE49-F238E27FC236}">
-                <a16:creationId xmlns:a16="http://schemas.microsoft.com/office/drawing/2014/main" id="{EA0FEC1B-B18E-454D-8B11-8BA33A139BF5}"/>
+                <a16:creationId xmlns:a16="http://schemas.microsoft.com/office/drawing/2014/main" id="{73D92731-EFA3-4B7A-A00B-6D50B18825C2}"/>
               </a:ext>
             </a:extLst>
           </p:cNvPr>
@@ -3821,7 +3821,7 @@
           <p:cNvPr id="12" name="">
             <a:extLst xmlns:a="http://schemas.openxmlformats.org/drawingml/2006/main">
               <a:ext uri="{FF2B5EF4-FFF2-40B4-BE49-F238E27FC236}">
-                <a16:creationId xmlns:a16="http://schemas.microsoft.com/office/drawing/2014/main" id="{0573C4AB-A51B-4BDF-8C57-3E6B64EC5502}"/>
+                <a16:creationId xmlns:a16="http://schemas.microsoft.com/office/drawing/2014/main" id="{21FCAEB4-A783-4F13-8208-C791CB1343E4}"/>
               </a:ext>
             </a:extLst>
           </p:cNvPr>
@@ -3878,7 +3878,7 @@
           <p:cNvPr id="13" name="">
             <a:extLst xmlns:a="http://schemas.openxmlformats.org/drawingml/2006/main">
               <a:ext uri="{FF2B5EF4-FFF2-40B4-BE49-F238E27FC236}">
-                <a16:creationId xmlns:a16="http://schemas.microsoft.com/office/drawing/2014/main" id="{CFFE2BD3-74A7-4144-A72D-780B3D67CEC3}"/>
+                <a16:creationId xmlns:a16="http://schemas.microsoft.com/office/drawing/2014/main" id="{B839A8F6-3A71-4D3F-A34E-570FF2594C21}"/>
               </a:ext>
             </a:extLst>
           </p:cNvPr>
@@ -3935,7 +3935,7 @@
           <p:cNvPr id="14" name="">
             <a:extLst xmlns:a="http://schemas.openxmlformats.org/drawingml/2006/main">
               <a:ext uri="{FF2B5EF4-FFF2-40B4-BE49-F238E27FC236}">
-                <a16:creationId xmlns:a16="http://schemas.microsoft.com/office/drawing/2014/main" id="{EE01D0C4-E883-499F-8956-17CCF78DAAC2}"/>
+                <a16:creationId xmlns:a16="http://schemas.microsoft.com/office/drawing/2014/main" id="{916EE5FB-985A-43CD-B6A5-BF3BD50E4170}"/>
               </a:ext>
             </a:extLst>
           </p:cNvPr>
@@ -3992,7 +3992,7 @@
           <p:cNvPr id="15" name="">
             <a:extLst xmlns:a="http://schemas.openxmlformats.org/drawingml/2006/main">
               <a:ext uri="{FF2B5EF4-FFF2-40B4-BE49-F238E27FC236}">
-                <a16:creationId xmlns:a16="http://schemas.microsoft.com/office/drawing/2014/main" id="{A29230D7-AAE0-47B0-8470-C5844E43A943}"/>
+                <a16:creationId xmlns:a16="http://schemas.microsoft.com/office/drawing/2014/main" id="{8430C00C-2F11-4F6D-9748-E12086314424}"/>
               </a:ext>
             </a:extLst>
           </p:cNvPr>
@@ -4026,7 +4026,7 @@
           <p:cNvPr id="16" name="">
             <a:extLst xmlns:a="http://schemas.openxmlformats.org/drawingml/2006/main">
               <a:ext uri="{FF2B5EF4-FFF2-40B4-BE49-F238E27FC236}">
-                <a16:creationId xmlns:a16="http://schemas.microsoft.com/office/drawing/2014/main" id="{75AC28FF-0BB0-4862-814F-21FBCC356D92}"/>
+                <a16:creationId xmlns:a16="http://schemas.microsoft.com/office/drawing/2014/main" id="{24403D26-5373-4262-A646-64ED51F691D9}"/>
               </a:ext>
             </a:extLst>
           </p:cNvPr>
@@ -4083,7 +4083,7 @@
           <p:cNvPr id="17" name="">
             <a:extLst xmlns:a="http://schemas.openxmlformats.org/drawingml/2006/main">
               <a:ext uri="{FF2B5EF4-FFF2-40B4-BE49-F238E27FC236}">
-                <a16:creationId xmlns:a16="http://schemas.microsoft.com/office/drawing/2014/main" id="{4AA83A25-4EA0-4E53-A5D0-8DF8976B4B50}"/>
+                <a16:creationId xmlns:a16="http://schemas.microsoft.com/office/drawing/2014/main" id="{CD94B08B-7F85-4D13-8F02-035ACFFF6F6B}"/>
               </a:ext>
             </a:extLst>
           </p:cNvPr>
@@ -4140,7 +4140,7 @@
           <p:cNvPr id="18" name="">
             <a:extLst xmlns:a="http://schemas.openxmlformats.org/drawingml/2006/main">
               <a:ext uri="{FF2B5EF4-FFF2-40B4-BE49-F238E27FC236}">
-                <a16:creationId xmlns:a16="http://schemas.microsoft.com/office/drawing/2014/main" id="{D9917BDE-566A-4E30-A05E-76B4B2AEB6AC}"/>
+                <a16:creationId xmlns:a16="http://schemas.microsoft.com/office/drawing/2014/main" id="{6E8460EB-12ED-471D-8554-249C07DBDB5D}"/>
               </a:ext>
             </a:extLst>
           </p:cNvPr>
@@ -4195,7 +4195,7 @@
     </p:spTree>
     <p:extLst>
       <p:ext uri="{BB962C8B-B14F-4D97-AF65-F5344CB8AC3E}">
-        <p14:creationId xmlns:p14="http://schemas.microsoft.com/office/powerpoint/2010/main" val="1682813458"/>
+        <p14:creationId xmlns:p14="http://schemas.microsoft.com/office/powerpoint/2010/main" val="1839342263"/>
       </p:ext>
     </p:extLst>
   </p:cSld>
@@ -4350,7 +4350,7 @@
           <p:cNvPr id="23" name="">
             <a:extLst xmlns:a="http://schemas.openxmlformats.org/drawingml/2006/main">
               <a:ext uri="{FF2B5EF4-FFF2-40B4-BE49-F238E27FC236}">
-                <a16:creationId xmlns:a16="http://schemas.microsoft.com/office/drawing/2014/main" id="{901B4331-74D8-451D-84CC-ECD675FCCC75}"/>
+                <a16:creationId xmlns:a16="http://schemas.microsoft.com/office/drawing/2014/main" id="{CF4F98D7-91AF-4713-90D5-B266C3DB20A6}"/>
               </a:ext>
             </a:extLst>
           </p:cNvPr>
@@ -4382,7 +4382,7 @@
           <p:cNvPr id="2" name="">
             <a:extLst xmlns:a="http://schemas.openxmlformats.org/drawingml/2006/main">
               <a:ext uri="{FF2B5EF4-FFF2-40B4-BE49-F238E27FC236}">
-                <a16:creationId xmlns:a16="http://schemas.microsoft.com/office/drawing/2014/main" id="{DFD119D1-B9C8-48E3-9367-C605DF0FB150}"/>
+                <a16:creationId xmlns:a16="http://schemas.microsoft.com/office/drawing/2014/main" id="{4FAF5185-8F6E-4320-A081-0FC88A6F5F5E}"/>
               </a:ext>
             </a:extLst>
           </p:cNvPr>
@@ -4439,7 +4439,7 @@
           <p:cNvPr id="3" name="">
             <a:extLst xmlns:a="http://schemas.openxmlformats.org/drawingml/2006/main">
               <a:ext uri="{FF2B5EF4-FFF2-40B4-BE49-F238E27FC236}">
-                <a16:creationId xmlns:a16="http://schemas.microsoft.com/office/drawing/2014/main" id="{64D1166F-8F5E-4B64-B593-16431A1D355E}"/>
+                <a16:creationId xmlns:a16="http://schemas.microsoft.com/office/drawing/2014/main" id="{485DBB27-61F7-48D0-B89B-343757778F9A}"/>
               </a:ext>
             </a:extLst>
           </p:cNvPr>
@@ -4471,7 +4471,7 @@
           <p:cNvPr id="4" name="">
             <a:extLst xmlns:a="http://schemas.openxmlformats.org/drawingml/2006/main">
               <a:ext uri="{FF2B5EF4-FFF2-40B4-BE49-F238E27FC236}">
-                <a16:creationId xmlns:a16="http://schemas.microsoft.com/office/drawing/2014/main" id="{F8F252D1-28A5-4B9F-89D5-1251BA643D49}"/>
+                <a16:creationId xmlns:a16="http://schemas.microsoft.com/office/drawing/2014/main" id="{0F42E472-3B46-477D-9DEF-CF8A129BC0DE}"/>
               </a:ext>
             </a:extLst>
           </p:cNvPr>
@@ -4528,7 +4528,7 @@
           <p:cNvPr id="5" name="">
             <a:extLst xmlns:a="http://schemas.openxmlformats.org/drawingml/2006/main">
               <a:ext uri="{FF2B5EF4-FFF2-40B4-BE49-F238E27FC236}">
-                <a16:creationId xmlns:a16="http://schemas.microsoft.com/office/drawing/2014/main" id="{251CD305-65FF-4EB5-83C1-9C94F7132C31}"/>
+                <a16:creationId xmlns:a16="http://schemas.microsoft.com/office/drawing/2014/main" id="{0771FFCA-7F36-4D98-A80B-765DA525B39A}"/>
               </a:ext>
             </a:extLst>
           </p:cNvPr>
@@ -4585,7 +4585,7 @@
           <p:cNvPr id="6" name="">
             <a:extLst xmlns:a="http://schemas.openxmlformats.org/drawingml/2006/main">
               <a:ext uri="{FF2B5EF4-FFF2-40B4-BE49-F238E27FC236}">
-                <a16:creationId xmlns:a16="http://schemas.microsoft.com/office/drawing/2014/main" id="{2B9FD428-AF22-4BBC-ACEA-32487B4B89BD}"/>
+                <a16:creationId xmlns:a16="http://schemas.microsoft.com/office/drawing/2014/main" id="{EF71E33F-F32F-4BA3-BD51-77C78276BFD6}"/>
               </a:ext>
             </a:extLst>
           </p:cNvPr>
@@ -4642,7 +4642,7 @@
           <p:cNvPr id="7" name="">
             <a:extLst xmlns:a="http://schemas.openxmlformats.org/drawingml/2006/main">
               <a:ext uri="{FF2B5EF4-FFF2-40B4-BE49-F238E27FC236}">
-                <a16:creationId xmlns:a16="http://schemas.microsoft.com/office/drawing/2014/main" id="{F7769BA1-A6A9-4B14-B7AE-B0AFE5064C48}"/>
+                <a16:creationId xmlns:a16="http://schemas.microsoft.com/office/drawing/2014/main" id="{349C0C8C-C693-4AC9-AA8E-3185DA537D8E}"/>
               </a:ext>
             </a:extLst>
           </p:cNvPr>
@@ -4674,7 +4674,7 @@
           <p:cNvPr id="8" name="">
             <a:extLst xmlns:a="http://schemas.openxmlformats.org/drawingml/2006/main">
               <a:ext uri="{FF2B5EF4-FFF2-40B4-BE49-F238E27FC236}">
-                <a16:creationId xmlns:a16="http://schemas.microsoft.com/office/drawing/2014/main" id="{A31BB595-2C42-493C-9587-5D85045A9C9D}"/>
+                <a16:creationId xmlns:a16="http://schemas.microsoft.com/office/drawing/2014/main" id="{B0F0A1A6-8E49-44F3-8B14-D1B5295A1697}"/>
               </a:ext>
             </a:extLst>
           </p:cNvPr>
@@ -4731,7 +4731,7 @@
           <p:cNvPr id="9" name="">
             <a:extLst xmlns:a="http://schemas.openxmlformats.org/drawingml/2006/main">
               <a:ext uri="{FF2B5EF4-FFF2-40B4-BE49-F238E27FC236}">
-                <a16:creationId xmlns:a16="http://schemas.microsoft.com/office/drawing/2014/main" id="{0456F1CE-E449-4AC0-A9E4-679E305B242F}"/>
+                <a16:creationId xmlns:a16="http://schemas.microsoft.com/office/drawing/2014/main" id="{B08C5449-8579-4BF3-9E2E-58ECA20AC32F}"/>
               </a:ext>
             </a:extLst>
           </p:cNvPr>
@@ -4788,7 +4788,7 @@
           <p:cNvPr id="10" name="">
             <a:extLst xmlns:a="http://schemas.openxmlformats.org/drawingml/2006/main">
               <a:ext uri="{FF2B5EF4-FFF2-40B4-BE49-F238E27FC236}">
-                <a16:creationId xmlns:a16="http://schemas.microsoft.com/office/drawing/2014/main" id="{0FF366F5-D7F4-4B00-8FC8-5AEFD288968B}"/>
+                <a16:creationId xmlns:a16="http://schemas.microsoft.com/office/drawing/2014/main" id="{9E51DE36-B0FC-4A83-A43B-9A6B65371F0F}"/>
               </a:ext>
             </a:extLst>
           </p:cNvPr>
@@ -4822,7 +4822,7 @@
           <p:cNvPr id="11" name="">
             <a:extLst xmlns:a="http://schemas.openxmlformats.org/drawingml/2006/main">
               <a:ext uri="{FF2B5EF4-FFF2-40B4-BE49-F238E27FC236}">
-                <a16:creationId xmlns:a16="http://schemas.microsoft.com/office/drawing/2014/main" id="{24211DF6-EBA0-490A-A979-1E273ACA41B2}"/>
+                <a16:creationId xmlns:a16="http://schemas.microsoft.com/office/drawing/2014/main" id="{502D8AAA-4237-4BB1-9416-00DE4379933F}"/>
               </a:ext>
             </a:extLst>
           </p:cNvPr>
@@ -4854,7 +4854,7 @@
           <p:cNvPr id="12" name="">
             <a:extLst xmlns:a="http://schemas.openxmlformats.org/drawingml/2006/main">
               <a:ext uri="{FF2B5EF4-FFF2-40B4-BE49-F238E27FC236}">
-                <a16:creationId xmlns:a16="http://schemas.microsoft.com/office/drawing/2014/main" id="{46673BFA-CC14-4962-9E8C-A0E2D5FD530C}"/>
+                <a16:creationId xmlns:a16="http://schemas.microsoft.com/office/drawing/2014/main" id="{DEA501A6-F8E7-4B04-93F1-5B9B811C3A4D}"/>
               </a:ext>
             </a:extLst>
           </p:cNvPr>
@@ -4911,7 +4911,7 @@
           <p:cNvPr id="13" name="">
             <a:extLst xmlns:a="http://schemas.openxmlformats.org/drawingml/2006/main">
               <a:ext uri="{FF2B5EF4-FFF2-40B4-BE49-F238E27FC236}">
-                <a16:creationId xmlns:a16="http://schemas.microsoft.com/office/drawing/2014/main" id="{ED297DCD-F530-4A29-8789-7CE79FB1EF4D}"/>
+                <a16:creationId xmlns:a16="http://schemas.microsoft.com/office/drawing/2014/main" id="{118E9DA6-E53E-4AF8-BA89-D1E9D823EA54}"/>
               </a:ext>
             </a:extLst>
           </p:cNvPr>
@@ -4968,7 +4968,7 @@
           <p:cNvPr id="14" name="">
             <a:extLst xmlns:a="http://schemas.openxmlformats.org/drawingml/2006/main">
               <a:ext uri="{FF2B5EF4-FFF2-40B4-BE49-F238E27FC236}">
-                <a16:creationId xmlns:a16="http://schemas.microsoft.com/office/drawing/2014/main" id="{A755DE55-1B0E-4110-89F2-C795F0C1A75C}"/>
+                <a16:creationId xmlns:a16="http://schemas.microsoft.com/office/drawing/2014/main" id="{ED4E4A17-4D2F-44FF-AA80-FFA8F6D87B47}"/>
               </a:ext>
             </a:extLst>
           </p:cNvPr>
@@ -5002,7 +5002,7 @@
           <p:cNvPr id="15" name="">
             <a:extLst xmlns:a="http://schemas.openxmlformats.org/drawingml/2006/main">
               <a:ext uri="{FF2B5EF4-FFF2-40B4-BE49-F238E27FC236}">
-                <a16:creationId xmlns:a16="http://schemas.microsoft.com/office/drawing/2014/main" id="{4757BDB5-3551-43F7-B788-C7E5BDD4451F}"/>
+                <a16:creationId xmlns:a16="http://schemas.microsoft.com/office/drawing/2014/main" id="{767CCD7B-F5BE-4980-8B38-8FF51DAD6139}"/>
               </a:ext>
             </a:extLst>
           </p:cNvPr>
@@ -5034,7 +5034,7 @@
           <p:cNvPr id="16" name="">
             <a:extLst xmlns:a="http://schemas.openxmlformats.org/drawingml/2006/main">
               <a:ext uri="{FF2B5EF4-FFF2-40B4-BE49-F238E27FC236}">
-                <a16:creationId xmlns:a16="http://schemas.microsoft.com/office/drawing/2014/main" id="{85589F22-084D-4325-AA97-F87ACE3038E5}"/>
+                <a16:creationId xmlns:a16="http://schemas.microsoft.com/office/drawing/2014/main" id="{7FC08ED4-B353-45A6-BD3F-C971E1BC57C6}"/>
               </a:ext>
             </a:extLst>
           </p:cNvPr>
@@ -5091,7 +5091,7 @@
           <p:cNvPr id="17" name="">
             <a:extLst xmlns:a="http://schemas.openxmlformats.org/drawingml/2006/main">
               <a:ext uri="{FF2B5EF4-FFF2-40B4-BE49-F238E27FC236}">
-                <a16:creationId xmlns:a16="http://schemas.microsoft.com/office/drawing/2014/main" id="{EAA1BD2D-756B-49D2-9C5A-D2E2CE258384}"/>
+                <a16:creationId xmlns:a16="http://schemas.microsoft.com/office/drawing/2014/main" id="{FC97B551-812A-4C3B-8720-D302E16B0156}"/>
               </a:ext>
             </a:extLst>
           </p:cNvPr>
@@ -5148,7 +5148,7 @@
           <p:cNvPr id="18" name="">
             <a:extLst xmlns:a="http://schemas.openxmlformats.org/drawingml/2006/main">
               <a:ext uri="{FF2B5EF4-FFF2-40B4-BE49-F238E27FC236}">
-                <a16:creationId xmlns:a16="http://schemas.microsoft.com/office/drawing/2014/main" id="{DB80C4A5-CF6D-49FD-B6BB-198581559D08}"/>
+                <a16:creationId xmlns:a16="http://schemas.microsoft.com/office/drawing/2014/main" id="{C441A200-557F-4BA6-9D02-C01381ED650F}"/>
               </a:ext>
             </a:extLst>
           </p:cNvPr>
@@ -5182,7 +5182,7 @@
           <p:cNvPr id="19" name="">
             <a:extLst xmlns:a="http://schemas.openxmlformats.org/drawingml/2006/main">
               <a:ext uri="{FF2B5EF4-FFF2-40B4-BE49-F238E27FC236}">
-                <a16:creationId xmlns:a16="http://schemas.microsoft.com/office/drawing/2014/main" id="{801A1122-B007-4541-9E83-046AE20F971B}"/>
+                <a16:creationId xmlns:a16="http://schemas.microsoft.com/office/drawing/2014/main" id="{77F2CB89-9D74-4D8F-9030-BF871F9369C9}"/>
               </a:ext>
             </a:extLst>
           </p:cNvPr>
@@ -5214,7 +5214,7 @@
           <p:cNvPr id="20" name="">
             <a:extLst xmlns:a="http://schemas.openxmlformats.org/drawingml/2006/main">
               <a:ext uri="{FF2B5EF4-FFF2-40B4-BE49-F238E27FC236}">
-                <a16:creationId xmlns:a16="http://schemas.microsoft.com/office/drawing/2014/main" id="{649342EC-8C5E-42C4-9B59-52C827A4F71F}"/>
+                <a16:creationId xmlns:a16="http://schemas.microsoft.com/office/drawing/2014/main" id="{B8321F5A-88EB-4A7D-AAB1-699ECF91C456}"/>
               </a:ext>
             </a:extLst>
           </p:cNvPr>
@@ -5271,7 +5271,7 @@
           <p:cNvPr id="21" name="">
             <a:extLst xmlns:a="http://schemas.openxmlformats.org/drawingml/2006/main">
               <a:ext uri="{FF2B5EF4-FFF2-40B4-BE49-F238E27FC236}">
-                <a16:creationId xmlns:a16="http://schemas.microsoft.com/office/drawing/2014/main" id="{6A78B431-215D-4156-A2D0-CBAE2F50E79E}"/>
+                <a16:creationId xmlns:a16="http://schemas.microsoft.com/office/drawing/2014/main" id="{61C54C3B-F9D0-4A5A-8107-6C2B22E7D6EF}"/>
               </a:ext>
             </a:extLst>
           </p:cNvPr>
@@ -5328,7 +5328,7 @@
           <p:cNvPr id="22" name="">
             <a:extLst xmlns:a="http://schemas.openxmlformats.org/drawingml/2006/main">
               <a:ext uri="{FF2B5EF4-FFF2-40B4-BE49-F238E27FC236}">
-                <a16:creationId xmlns:a16="http://schemas.microsoft.com/office/drawing/2014/main" id="{1F77CB93-1574-4D61-AB31-AC549D202549}"/>
+                <a16:creationId xmlns:a16="http://schemas.microsoft.com/office/drawing/2014/main" id="{F954596B-20A0-4CAF-9D03-FA3C5F8AC4F0}"/>
               </a:ext>
             </a:extLst>
           </p:cNvPr>
@@ -5383,7 +5383,7 @@
     </p:spTree>
     <p:extLst>
       <p:ext uri="{BB962C8B-B14F-4D97-AF65-F5344CB8AC3E}">
-        <p14:creationId xmlns:p14="http://schemas.microsoft.com/office/powerpoint/2010/main" val="2057637146"/>
+        <p14:creationId xmlns:p14="http://schemas.microsoft.com/office/powerpoint/2010/main" val="706985543"/>
       </p:ext>
     </p:extLst>
   </p:cSld>
@@ -5584,7 +5584,7 @@
           <p:cNvPr id="23" name="">
             <a:extLst xmlns:a="http://schemas.openxmlformats.org/drawingml/2006/main">
               <a:ext uri="{FF2B5EF4-FFF2-40B4-BE49-F238E27FC236}">
-                <a16:creationId xmlns:a16="http://schemas.microsoft.com/office/drawing/2014/main" id="{C14E4528-5C45-47B6-977E-72545EF270D4}"/>
+                <a16:creationId xmlns:a16="http://schemas.microsoft.com/office/drawing/2014/main" id="{D9B1C3C6-F86E-42AF-A284-1046C3D6EFB4}"/>
               </a:ext>
             </a:extLst>
           </p:cNvPr>
@@ -5616,7 +5616,7 @@
           <p:cNvPr id="2" name="">
             <a:extLst xmlns:a="http://schemas.openxmlformats.org/drawingml/2006/main">
               <a:ext uri="{FF2B5EF4-FFF2-40B4-BE49-F238E27FC236}">
-                <a16:creationId xmlns:a16="http://schemas.microsoft.com/office/drawing/2014/main" id="{C9737168-6B55-4E32-9241-D1148D1DF402}"/>
+                <a16:creationId xmlns:a16="http://schemas.microsoft.com/office/drawing/2014/main" id="{ACE0FEE7-E134-4168-9DE7-0CE77F5A9876}"/>
               </a:ext>
             </a:extLst>
           </p:cNvPr>
@@ -5673,7 +5673,7 @@
           <p:cNvPr id="3" name="">
             <a:extLst xmlns:a="http://schemas.openxmlformats.org/drawingml/2006/main">
               <a:ext uri="{FF2B5EF4-FFF2-40B4-BE49-F238E27FC236}">
-                <a16:creationId xmlns:a16="http://schemas.microsoft.com/office/drawing/2014/main" id="{0E13F0BA-DF13-46F2-9766-84C0A855B8BE}"/>
+                <a16:creationId xmlns:a16="http://schemas.microsoft.com/office/drawing/2014/main" id="{1B09C52C-494B-4491-B18E-6057A9FBD913}"/>
               </a:ext>
             </a:extLst>
           </p:cNvPr>
@@ -5705,7 +5705,7 @@
           <p:cNvPr id="4" name="">
             <a:extLst xmlns:a="http://schemas.openxmlformats.org/drawingml/2006/main">
               <a:ext uri="{FF2B5EF4-FFF2-40B4-BE49-F238E27FC236}">
-                <a16:creationId xmlns:a16="http://schemas.microsoft.com/office/drawing/2014/main" id="{1D93676E-2ACC-4942-BAEA-9F19AD7F7084}"/>
+                <a16:creationId xmlns:a16="http://schemas.microsoft.com/office/drawing/2014/main" id="{B57FFBF8-E628-440C-AAE1-F85B93EF43C1}"/>
               </a:ext>
             </a:extLst>
           </p:cNvPr>
@@ -5762,7 +5762,7 @@
           <p:cNvPr id="5" name="">
             <a:extLst xmlns:a="http://schemas.openxmlformats.org/drawingml/2006/main">
               <a:ext uri="{FF2B5EF4-FFF2-40B4-BE49-F238E27FC236}">
-                <a16:creationId xmlns:a16="http://schemas.microsoft.com/office/drawing/2014/main" id="{7FCA388A-CBA7-4095-A597-36EFA157DDEC}"/>
+                <a16:creationId xmlns:a16="http://schemas.microsoft.com/office/drawing/2014/main" id="{FB3889C3-6BD0-46B7-9B07-45E5D6D08D5A}"/>
               </a:ext>
             </a:extLst>
           </p:cNvPr>
@@ -5819,7 +5819,7 @@
           <p:cNvPr id="6" name="">
             <a:extLst xmlns:a="http://schemas.openxmlformats.org/drawingml/2006/main">
               <a:ext uri="{FF2B5EF4-FFF2-40B4-BE49-F238E27FC236}">
-                <a16:creationId xmlns:a16="http://schemas.microsoft.com/office/drawing/2014/main" id="{7A3A1CC5-4406-49FE-9398-A5D4FA99B151}"/>
+                <a16:creationId xmlns:a16="http://schemas.microsoft.com/office/drawing/2014/main" id="{CC9631F6-AF41-47E0-932E-56A2895913DA}"/>
               </a:ext>
             </a:extLst>
           </p:cNvPr>
@@ -5876,7 +5876,7 @@
           <p:cNvPr id="7" name="">
             <a:extLst xmlns:a="http://schemas.openxmlformats.org/drawingml/2006/main">
               <a:ext uri="{FF2B5EF4-FFF2-40B4-BE49-F238E27FC236}">
-                <a16:creationId xmlns:a16="http://schemas.microsoft.com/office/drawing/2014/main" id="{FF18C37F-882F-4DC0-82CC-F713D2D7161B}"/>
+                <a16:creationId xmlns:a16="http://schemas.microsoft.com/office/drawing/2014/main" id="{B32D30F6-8031-434D-85A7-26548A2C25E1}"/>
               </a:ext>
             </a:extLst>
           </p:cNvPr>
@@ -5908,7 +5908,7 @@
           <p:cNvPr id="8" name="">
             <a:extLst xmlns:a="http://schemas.openxmlformats.org/drawingml/2006/main">
               <a:ext uri="{FF2B5EF4-FFF2-40B4-BE49-F238E27FC236}">
-                <a16:creationId xmlns:a16="http://schemas.microsoft.com/office/drawing/2014/main" id="{827206BA-C923-43D1-A97F-C081AA1E2AE2}"/>
+                <a16:creationId xmlns:a16="http://schemas.microsoft.com/office/drawing/2014/main" id="{036FAD3C-F7CF-4399-BAAC-CA5495596C90}"/>
               </a:ext>
             </a:extLst>
           </p:cNvPr>
@@ -5965,7 +5965,7 @@
           <p:cNvPr id="9" name="">
             <a:extLst xmlns:a="http://schemas.openxmlformats.org/drawingml/2006/main">
               <a:ext uri="{FF2B5EF4-FFF2-40B4-BE49-F238E27FC236}">
-                <a16:creationId xmlns:a16="http://schemas.microsoft.com/office/drawing/2014/main" id="{BAEB6F01-D2C0-4AF6-8C73-EB44F2747CA6}"/>
+                <a16:creationId xmlns:a16="http://schemas.microsoft.com/office/drawing/2014/main" id="{84716B92-C2E4-40E9-9119-234A43BE44EA}"/>
               </a:ext>
             </a:extLst>
           </p:cNvPr>
@@ -6022,7 +6022,7 @@
           <p:cNvPr id="10" name="">
             <a:extLst xmlns:a="http://schemas.openxmlformats.org/drawingml/2006/main">
               <a:ext uri="{FF2B5EF4-FFF2-40B4-BE49-F238E27FC236}">
-                <a16:creationId xmlns:a16="http://schemas.microsoft.com/office/drawing/2014/main" id="{E763A50A-8D73-4D31-911E-7BCF5D2A91B0}"/>
+                <a16:creationId xmlns:a16="http://schemas.microsoft.com/office/drawing/2014/main" id="{2D68525E-C6B4-466C-AF6B-3692011793B2}"/>
               </a:ext>
             </a:extLst>
           </p:cNvPr>
@@ -6056,7 +6056,7 @@
           <p:cNvPr id="11" name="">
             <a:extLst xmlns:a="http://schemas.openxmlformats.org/drawingml/2006/main">
               <a:ext uri="{FF2B5EF4-FFF2-40B4-BE49-F238E27FC236}">
-                <a16:creationId xmlns:a16="http://schemas.microsoft.com/office/drawing/2014/main" id="{AE794C69-1CC9-44ED-85E3-FDA314A82DA3}"/>
+                <a16:creationId xmlns:a16="http://schemas.microsoft.com/office/drawing/2014/main" id="{D8C68E60-8D08-4441-80F8-936718A9D84E}"/>
               </a:ext>
             </a:extLst>
           </p:cNvPr>
@@ -6088,7 +6088,7 @@
           <p:cNvPr id="12" name="">
             <a:extLst xmlns:a="http://schemas.openxmlformats.org/drawingml/2006/main">
               <a:ext uri="{FF2B5EF4-FFF2-40B4-BE49-F238E27FC236}">
-                <a16:creationId xmlns:a16="http://schemas.microsoft.com/office/drawing/2014/main" id="{1E32F07A-1E63-4ADE-9808-BEE3C0816996}"/>
+                <a16:creationId xmlns:a16="http://schemas.microsoft.com/office/drawing/2014/main" id="{3A64C7E6-0EEC-4563-AEE9-CF468CD196AC}"/>
               </a:ext>
             </a:extLst>
           </p:cNvPr>
@@ -6145,7 +6145,7 @@
           <p:cNvPr id="13" name="">
             <a:extLst xmlns:a="http://schemas.openxmlformats.org/drawingml/2006/main">
               <a:ext uri="{FF2B5EF4-FFF2-40B4-BE49-F238E27FC236}">
-                <a16:creationId xmlns:a16="http://schemas.microsoft.com/office/drawing/2014/main" id="{ABA70177-1454-4DAB-9FBF-9B36159F367A}"/>
+                <a16:creationId xmlns:a16="http://schemas.microsoft.com/office/drawing/2014/main" id="{4D1769B9-DFC5-4893-841F-3BB003671C8C}"/>
               </a:ext>
             </a:extLst>
           </p:cNvPr>
@@ -6202,7 +6202,7 @@
           <p:cNvPr id="14" name="">
             <a:extLst xmlns:a="http://schemas.openxmlformats.org/drawingml/2006/main">
               <a:ext uri="{FF2B5EF4-FFF2-40B4-BE49-F238E27FC236}">
-                <a16:creationId xmlns:a16="http://schemas.microsoft.com/office/drawing/2014/main" id="{C2596464-CDD0-4A07-9D47-B9955F75226B}"/>
+                <a16:creationId xmlns:a16="http://schemas.microsoft.com/office/drawing/2014/main" id="{077171B9-7F24-4372-930E-33B0605A27D6}"/>
               </a:ext>
             </a:extLst>
           </p:cNvPr>
@@ -6236,7 +6236,7 @@
           <p:cNvPr id="15" name="">
             <a:extLst xmlns:a="http://schemas.openxmlformats.org/drawingml/2006/main">
               <a:ext uri="{FF2B5EF4-FFF2-40B4-BE49-F238E27FC236}">
-                <a16:creationId xmlns:a16="http://schemas.microsoft.com/office/drawing/2014/main" id="{1A745DD0-C496-43E6-86C8-ADE6A83E8783}"/>
+                <a16:creationId xmlns:a16="http://schemas.microsoft.com/office/drawing/2014/main" id="{F29E6F8D-93A4-422C-A5F2-A2CD3FE7BEF3}"/>
               </a:ext>
             </a:extLst>
           </p:cNvPr>
@@ -6268,7 +6268,7 @@
           <p:cNvPr id="16" name="">
             <a:extLst xmlns:a="http://schemas.openxmlformats.org/drawingml/2006/main">
               <a:ext uri="{FF2B5EF4-FFF2-40B4-BE49-F238E27FC236}">
-                <a16:creationId xmlns:a16="http://schemas.microsoft.com/office/drawing/2014/main" id="{23D6E669-3BCF-4A0B-BD57-9FBC79D31372}"/>
+                <a16:creationId xmlns:a16="http://schemas.microsoft.com/office/drawing/2014/main" id="{8A945E36-9259-418D-B983-085011EA33AC}"/>
               </a:ext>
             </a:extLst>
           </p:cNvPr>
@@ -6325,7 +6325,7 @@
           <p:cNvPr id="17" name="">
             <a:extLst xmlns:a="http://schemas.openxmlformats.org/drawingml/2006/main">
               <a:ext uri="{FF2B5EF4-FFF2-40B4-BE49-F238E27FC236}">
-                <a16:creationId xmlns:a16="http://schemas.microsoft.com/office/drawing/2014/main" id="{6FCA80BB-1B2F-423F-9B4D-D67BBA3B37D2}"/>
+                <a16:creationId xmlns:a16="http://schemas.microsoft.com/office/drawing/2014/main" id="{0BB78388-00DA-4493-94DF-EB48630118A7}"/>
               </a:ext>
             </a:extLst>
           </p:cNvPr>
@@ -6382,7 +6382,7 @@
           <p:cNvPr id="18" name="">
             <a:extLst xmlns:a="http://schemas.openxmlformats.org/drawingml/2006/main">
               <a:ext uri="{FF2B5EF4-FFF2-40B4-BE49-F238E27FC236}">
-                <a16:creationId xmlns:a16="http://schemas.microsoft.com/office/drawing/2014/main" id="{181C2C44-A1DB-4AF9-9FAE-FA20220A716A}"/>
+                <a16:creationId xmlns:a16="http://schemas.microsoft.com/office/drawing/2014/main" id="{2F03FEB6-611E-477E-9FF5-FCDA50968459}"/>
               </a:ext>
             </a:extLst>
           </p:cNvPr>
@@ -6416,7 +6416,7 @@
           <p:cNvPr id="19" name="">
             <a:extLst xmlns:a="http://schemas.openxmlformats.org/drawingml/2006/main">
               <a:ext uri="{FF2B5EF4-FFF2-40B4-BE49-F238E27FC236}">
-                <a16:creationId xmlns:a16="http://schemas.microsoft.com/office/drawing/2014/main" id="{3798736A-4E0D-4B5D-BC63-11E69ACAC661}"/>
+                <a16:creationId xmlns:a16="http://schemas.microsoft.com/office/drawing/2014/main" id="{B8F49EFC-4AC9-4176-BF69-496F32599D33}"/>
               </a:ext>
             </a:extLst>
           </p:cNvPr>
@@ -6448,7 +6448,7 @@
           <p:cNvPr id="20" name="">
             <a:extLst xmlns:a="http://schemas.openxmlformats.org/drawingml/2006/main">
               <a:ext uri="{FF2B5EF4-FFF2-40B4-BE49-F238E27FC236}">
-                <a16:creationId xmlns:a16="http://schemas.microsoft.com/office/drawing/2014/main" id="{528F5546-55E2-4C3A-AC9D-DE0C9EB7C98D}"/>
+                <a16:creationId xmlns:a16="http://schemas.microsoft.com/office/drawing/2014/main" id="{FE2FC8BF-F727-4BB8-928E-1E4853DB7EE5}"/>
               </a:ext>
             </a:extLst>
           </p:cNvPr>
@@ -6505,7 +6505,7 @@
           <p:cNvPr id="21" name="">
             <a:extLst xmlns:a="http://schemas.openxmlformats.org/drawingml/2006/main">
               <a:ext uri="{FF2B5EF4-FFF2-40B4-BE49-F238E27FC236}">
-                <a16:creationId xmlns:a16="http://schemas.microsoft.com/office/drawing/2014/main" id="{CB75397F-8C99-42E0-9DBC-87AEAB9D172B}"/>
+                <a16:creationId xmlns:a16="http://schemas.microsoft.com/office/drawing/2014/main" id="{02E7736D-3F66-4C41-8550-600DFD9A07A7}"/>
               </a:ext>
             </a:extLst>
           </p:cNvPr>
@@ -6562,7 +6562,7 @@
           <p:cNvPr id="22" name="">
             <a:extLst xmlns:a="http://schemas.openxmlformats.org/drawingml/2006/main">
               <a:ext uri="{FF2B5EF4-FFF2-40B4-BE49-F238E27FC236}">
-                <a16:creationId xmlns:a16="http://schemas.microsoft.com/office/drawing/2014/main" id="{4F214F61-C4E4-4597-AAC0-E1893139A8C4}"/>
+                <a16:creationId xmlns:a16="http://schemas.microsoft.com/office/drawing/2014/main" id="{5F54DC84-F2FE-41CC-9A06-3631FD798281}"/>
               </a:ext>
             </a:extLst>
           </p:cNvPr>
@@ -6617,7 +6617,7 @@
     </p:spTree>
     <p:extLst>
       <p:ext uri="{BB962C8B-B14F-4D97-AF65-F5344CB8AC3E}">
-        <p14:creationId xmlns:p14="http://schemas.microsoft.com/office/powerpoint/2010/main" val="506055786"/>
+        <p14:creationId xmlns:p14="http://schemas.microsoft.com/office/powerpoint/2010/main" val="497998440"/>
       </p:ext>
     </p:extLst>
   </p:cSld>
@@ -6818,7 +6818,7 @@
           <p:cNvPr id="16" name="">
             <a:extLst xmlns:a="http://schemas.openxmlformats.org/drawingml/2006/main">
               <a:ext uri="{FF2B5EF4-FFF2-40B4-BE49-F238E27FC236}">
-                <a16:creationId xmlns:a16="http://schemas.microsoft.com/office/drawing/2014/main" id="{0DD13D1A-B177-4095-B832-0E49342306F1}"/>
+                <a16:creationId xmlns:a16="http://schemas.microsoft.com/office/drawing/2014/main" id="{4BF3B738-B1B5-47B8-A34F-09B10BD0E963}"/>
               </a:ext>
             </a:extLst>
           </p:cNvPr>
@@ -6850,7 +6850,7 @@
           <p:cNvPr id="2" name="">
             <a:extLst xmlns:a="http://schemas.openxmlformats.org/drawingml/2006/main">
               <a:ext uri="{FF2B5EF4-FFF2-40B4-BE49-F238E27FC236}">
-                <a16:creationId xmlns:a16="http://schemas.microsoft.com/office/drawing/2014/main" id="{C87800EC-0F5F-4A54-B64D-885E055008DE}"/>
+                <a16:creationId xmlns:a16="http://schemas.microsoft.com/office/drawing/2014/main" id="{BED57897-6745-45F2-A3B7-9868E7BF384E}"/>
               </a:ext>
             </a:extLst>
           </p:cNvPr>
@@ -6907,7 +6907,7 @@
           <p:cNvPr id="3" name="">
             <a:extLst xmlns:a="http://schemas.openxmlformats.org/drawingml/2006/main">
               <a:ext uri="{FF2B5EF4-FFF2-40B4-BE49-F238E27FC236}">
-                <a16:creationId xmlns:a16="http://schemas.microsoft.com/office/drawing/2014/main" id="{6FB8EA0C-B504-4767-AADB-6784773CB087}"/>
+                <a16:creationId xmlns:a16="http://schemas.microsoft.com/office/drawing/2014/main" id="{5F028128-0655-4FD7-9717-0330A9AE8539}"/>
               </a:ext>
             </a:extLst>
           </p:cNvPr>
@@ -6939,7 +6939,7 @@
           <p:cNvPr id="4" name="">
             <a:extLst xmlns:a="http://schemas.openxmlformats.org/drawingml/2006/main">
               <a:ext uri="{FF2B5EF4-FFF2-40B4-BE49-F238E27FC236}">
-                <a16:creationId xmlns:a16="http://schemas.microsoft.com/office/drawing/2014/main" id="{D42DE6C7-5587-49F5-8EAD-759E7EDCF4AB}"/>
+                <a16:creationId xmlns:a16="http://schemas.microsoft.com/office/drawing/2014/main" id="{E6D77767-3D9E-46EE-92D3-C128EE5E0429}"/>
               </a:ext>
             </a:extLst>
           </p:cNvPr>
@@ -6996,7 +6996,7 @@
           <p:cNvPr id="5" name="">
             <a:extLst xmlns:a="http://schemas.openxmlformats.org/drawingml/2006/main">
               <a:ext uri="{FF2B5EF4-FFF2-40B4-BE49-F238E27FC236}">
-                <a16:creationId xmlns:a16="http://schemas.microsoft.com/office/drawing/2014/main" id="{D89493A6-A7EA-40CF-8F75-52C5E3690052}"/>
+                <a16:creationId xmlns:a16="http://schemas.microsoft.com/office/drawing/2014/main" id="{0221EA07-97FC-4A46-897B-03E75E0530E3}"/>
               </a:ext>
             </a:extLst>
           </p:cNvPr>
@@ -7053,7 +7053,7 @@
           <p:cNvPr id="6" name="">
             <a:extLst xmlns:a="http://schemas.openxmlformats.org/drawingml/2006/main">
               <a:ext uri="{FF2B5EF4-FFF2-40B4-BE49-F238E27FC236}">
-                <a16:creationId xmlns:a16="http://schemas.microsoft.com/office/drawing/2014/main" id="{E2457FA4-4030-4F1A-9A28-85415A9A46BA}"/>
+                <a16:creationId xmlns:a16="http://schemas.microsoft.com/office/drawing/2014/main" id="{8B49B6AD-F09B-4664-9CAF-1473181A10AA}"/>
               </a:ext>
             </a:extLst>
           </p:cNvPr>
@@ -7110,7 +7110,7 @@
           <p:cNvPr id="7" name="">
             <a:extLst xmlns:a="http://schemas.openxmlformats.org/drawingml/2006/main">
               <a:ext uri="{FF2B5EF4-FFF2-40B4-BE49-F238E27FC236}">
-                <a16:creationId xmlns:a16="http://schemas.microsoft.com/office/drawing/2014/main" id="{DADFC210-6939-41EA-A7B1-D78B344C6CD5}"/>
+                <a16:creationId xmlns:a16="http://schemas.microsoft.com/office/drawing/2014/main" id="{57005EDC-0D54-4B6F-9407-2ABD11CC0B79}"/>
               </a:ext>
             </a:extLst>
           </p:cNvPr>
@@ -7142,7 +7142,7 @@
           <p:cNvPr id="8" name="">
             <a:extLst xmlns:a="http://schemas.openxmlformats.org/drawingml/2006/main">
               <a:ext uri="{FF2B5EF4-FFF2-40B4-BE49-F238E27FC236}">
-                <a16:creationId xmlns:a16="http://schemas.microsoft.com/office/drawing/2014/main" id="{E58FBF19-BCDE-4221-9A9F-415297740ECC}"/>
+                <a16:creationId xmlns:a16="http://schemas.microsoft.com/office/drawing/2014/main" id="{EEB63B41-D544-45CD-8394-47339714BE78}"/>
               </a:ext>
             </a:extLst>
           </p:cNvPr>
@@ -7199,7 +7199,7 @@
           <p:cNvPr id="9" name="">
             <a:extLst xmlns:a="http://schemas.openxmlformats.org/drawingml/2006/main">
               <a:ext uri="{FF2B5EF4-FFF2-40B4-BE49-F238E27FC236}">
-                <a16:creationId xmlns:a16="http://schemas.microsoft.com/office/drawing/2014/main" id="{D0CF9D56-A839-41CD-9970-7D2E47B287F8}"/>
+                <a16:creationId xmlns:a16="http://schemas.microsoft.com/office/drawing/2014/main" id="{69E40FEC-D31F-4E89-A281-C8CA8D521FCA}"/>
               </a:ext>
             </a:extLst>
           </p:cNvPr>
@@ -7256,7 +7256,7 @@
           <p:cNvPr id="10" name="">
             <a:extLst xmlns:a="http://schemas.openxmlformats.org/drawingml/2006/main">
               <a:ext uri="{FF2B5EF4-FFF2-40B4-BE49-F238E27FC236}">
-                <a16:creationId xmlns:a16="http://schemas.microsoft.com/office/drawing/2014/main" id="{33E9C458-8BE6-4762-BF75-4E9868B2BA85}"/>
+                <a16:creationId xmlns:a16="http://schemas.microsoft.com/office/drawing/2014/main" id="{EDF20ACD-CBD4-47CF-9412-0305F62EAD4D}"/>
               </a:ext>
             </a:extLst>
           </p:cNvPr>
@@ -7313,7 +7313,7 @@
           <p:cNvPr id="11" name="">
             <a:extLst xmlns:a="http://schemas.openxmlformats.org/drawingml/2006/main">
               <a:ext uri="{FF2B5EF4-FFF2-40B4-BE49-F238E27FC236}">
-                <a16:creationId xmlns:a16="http://schemas.microsoft.com/office/drawing/2014/main" id="{99F235AF-3BA3-45FB-8C56-C7EC1363A76F}"/>
+                <a16:creationId xmlns:a16="http://schemas.microsoft.com/office/drawing/2014/main" id="{9B050F35-B782-4A40-A121-FB7B22487A71}"/>
               </a:ext>
             </a:extLst>
           </p:cNvPr>
@@ -7345,7 +7345,7 @@
           <p:cNvPr id="12" name="">
             <a:extLst xmlns:a="http://schemas.openxmlformats.org/drawingml/2006/main">
               <a:ext uri="{FF2B5EF4-FFF2-40B4-BE49-F238E27FC236}">
-                <a16:creationId xmlns:a16="http://schemas.microsoft.com/office/drawing/2014/main" id="{C1224E98-243F-4F5E-95BA-9AC494F25CCC}"/>
+                <a16:creationId xmlns:a16="http://schemas.microsoft.com/office/drawing/2014/main" id="{DB2ACCC3-9951-4BE5-A7DC-F0A76BA7EDE2}"/>
               </a:ext>
             </a:extLst>
           </p:cNvPr>
@@ -7402,7 +7402,7 @@
           <p:cNvPr id="13" name="">
             <a:extLst xmlns:a="http://schemas.openxmlformats.org/drawingml/2006/main">
               <a:ext uri="{FF2B5EF4-FFF2-40B4-BE49-F238E27FC236}">
-                <a16:creationId xmlns:a16="http://schemas.microsoft.com/office/drawing/2014/main" id="{64A7E883-9BB3-47F7-AE70-050D08518F19}"/>
+                <a16:creationId xmlns:a16="http://schemas.microsoft.com/office/drawing/2014/main" id="{B32EBD1B-43F3-4BAA-A847-A90763737BC1}"/>
               </a:ext>
             </a:extLst>
           </p:cNvPr>
@@ -7459,7 +7459,7 @@
           <p:cNvPr id="14" name="">
             <a:extLst xmlns:a="http://schemas.openxmlformats.org/drawingml/2006/main">
               <a:ext uri="{FF2B5EF4-FFF2-40B4-BE49-F238E27FC236}">
-                <a16:creationId xmlns:a16="http://schemas.microsoft.com/office/drawing/2014/main" id="{3FBD2062-AD0E-4E05-AAE2-78578B23FB7F}"/>
+                <a16:creationId xmlns:a16="http://schemas.microsoft.com/office/drawing/2014/main" id="{284BD9E4-75EC-4B21-A5FB-1909077A11CB}"/>
               </a:ext>
             </a:extLst>
           </p:cNvPr>
@@ -7516,7 +7516,7 @@
           <p:cNvPr id="15" name="">
             <a:extLst xmlns:a="http://schemas.openxmlformats.org/drawingml/2006/main">
               <a:ext uri="{FF2B5EF4-FFF2-40B4-BE49-F238E27FC236}">
-                <a16:creationId xmlns:a16="http://schemas.microsoft.com/office/drawing/2014/main" id="{DC9A0FE2-E681-4A71-89B3-BB52FB624188}"/>
+                <a16:creationId xmlns:a16="http://schemas.microsoft.com/office/drawing/2014/main" id="{82864665-B495-4F6E-88ED-C0A5AB99F91F}"/>
               </a:ext>
             </a:extLst>
           </p:cNvPr>
@@ -7571,7 +7571,7 @@
     </p:spTree>
     <p:extLst>
       <p:ext uri="{BB962C8B-B14F-4D97-AF65-F5344CB8AC3E}">
-        <p14:creationId xmlns:p14="http://schemas.microsoft.com/office/powerpoint/2010/main" val="23701159"/>
+        <p14:creationId xmlns:p14="http://schemas.microsoft.com/office/powerpoint/2010/main" val="227151711"/>
       </p:ext>
     </p:extLst>
   </p:cSld>
@@ -7769,10 +7769,10 @@
       </p:grpSpPr>
       <p:sp>
         <p:nvSpPr>
-          <p:cNvPr id="23" name="">
-            <a:extLst xmlns:a="http://schemas.openxmlformats.org/drawingml/2006/main">
-              <a:ext uri="{FF2B5EF4-FFF2-40B4-BE49-F238E27FC236}">
-                <a16:creationId xmlns:a16="http://schemas.microsoft.com/office/drawing/2014/main" id="{4504A18D-9ABC-4223-9556-33DD274DD996}"/>
+          <p:cNvPr id="26" name="">
+            <a:extLst xmlns:a="http://schemas.openxmlformats.org/drawingml/2006/main">
+              <a:ext uri="{FF2B5EF4-FFF2-40B4-BE49-F238E27FC236}">
+                <a16:creationId xmlns:a16="http://schemas.microsoft.com/office/drawing/2014/main" id="{37024928-7FCC-4F12-9F65-76EAAA7FA390}"/>
               </a:ext>
             </a:extLst>
           </p:cNvPr>
@@ -7804,7 +7804,7 @@
           <p:cNvPr id="2" name="">
             <a:extLst xmlns:a="http://schemas.openxmlformats.org/drawingml/2006/main">
               <a:ext uri="{FF2B5EF4-FFF2-40B4-BE49-F238E27FC236}">
-                <a16:creationId xmlns:a16="http://schemas.microsoft.com/office/drawing/2014/main" id="{5BF159EE-77CD-472D-81DC-EFCD77A57625}"/>
+                <a16:creationId xmlns:a16="http://schemas.microsoft.com/office/drawing/2014/main" id="{F42D3122-6337-4BA3-B5CB-3BF50930C05C}"/>
               </a:ext>
             </a:extLst>
           </p:cNvPr>
@@ -7861,7 +7861,7 @@
           <p:cNvPr id="3" name="">
             <a:extLst xmlns:a="http://schemas.openxmlformats.org/drawingml/2006/main">
               <a:ext uri="{FF2B5EF4-FFF2-40B4-BE49-F238E27FC236}">
-                <a16:creationId xmlns:a16="http://schemas.microsoft.com/office/drawing/2014/main" id="{8239A940-94D9-4204-B518-3BBB5253C61B}"/>
+                <a16:creationId xmlns:a16="http://schemas.microsoft.com/office/drawing/2014/main" id="{385A4D96-A73A-4550-93F4-7C94B1D1D589}"/>
               </a:ext>
             </a:extLst>
           </p:cNvPr>
@@ -7893,7 +7893,7 @@
           <p:cNvPr id="4" name="">
             <a:extLst xmlns:a="http://schemas.openxmlformats.org/drawingml/2006/main">
               <a:ext uri="{FF2B5EF4-FFF2-40B4-BE49-F238E27FC236}">
-                <a16:creationId xmlns:a16="http://schemas.microsoft.com/office/drawing/2014/main" id="{396B8482-A9E1-473B-98A0-BBD32BD9144A}"/>
+                <a16:creationId xmlns:a16="http://schemas.microsoft.com/office/drawing/2014/main" id="{96EE5B83-6C57-4014-B240-00594CA24580}"/>
               </a:ext>
             </a:extLst>
           </p:cNvPr>
@@ -7950,7 +7950,7 @@
           <p:cNvPr id="5" name="">
             <a:extLst xmlns:a="http://schemas.openxmlformats.org/drawingml/2006/main">
               <a:ext uri="{FF2B5EF4-FFF2-40B4-BE49-F238E27FC236}">
-                <a16:creationId xmlns:a16="http://schemas.microsoft.com/office/drawing/2014/main" id="{729470F2-3D0A-4CAC-8B50-45E6F636C45D}"/>
+                <a16:creationId xmlns:a16="http://schemas.microsoft.com/office/drawing/2014/main" id="{BC91A8B7-79DD-4B47-943C-7550EB8C7AF8}"/>
               </a:ext>
             </a:extLst>
           </p:cNvPr>
@@ -8007,7 +8007,7 @@
           <p:cNvPr id="6" name="">
             <a:extLst xmlns:a="http://schemas.openxmlformats.org/drawingml/2006/main">
               <a:ext uri="{FF2B5EF4-FFF2-40B4-BE49-F238E27FC236}">
-                <a16:creationId xmlns:a16="http://schemas.microsoft.com/office/drawing/2014/main" id="{A3812DBA-2CDF-40DE-A9AC-E301F468F721}"/>
+                <a16:creationId xmlns:a16="http://schemas.microsoft.com/office/drawing/2014/main" id="{7111F4C6-75E8-41C1-BAD7-790B36A60E3D}"/>
               </a:ext>
             </a:extLst>
           </p:cNvPr>
@@ -8064,7 +8064,7 @@
           <p:cNvPr id="7" name="">
             <a:extLst xmlns:a="http://schemas.openxmlformats.org/drawingml/2006/main">
               <a:ext uri="{FF2B5EF4-FFF2-40B4-BE49-F238E27FC236}">
-                <a16:creationId xmlns:a16="http://schemas.microsoft.com/office/drawing/2014/main" id="{36FE6393-4571-402F-91EB-DF5B55361354}"/>
+                <a16:creationId xmlns:a16="http://schemas.microsoft.com/office/drawing/2014/main" id="{46925FC7-6C65-4DF7-ABE6-E883F4544798}"/>
               </a:ext>
             </a:extLst>
           </p:cNvPr>
@@ -8096,7 +8096,7 @@
           <p:cNvPr id="8" name="">
             <a:extLst xmlns:a="http://schemas.openxmlformats.org/drawingml/2006/main">
               <a:ext uri="{FF2B5EF4-FFF2-40B4-BE49-F238E27FC236}">
-                <a16:creationId xmlns:a16="http://schemas.microsoft.com/office/drawing/2014/main" id="{7ABF6FE0-4C39-4522-A45D-858F40BC8D9B}"/>
+                <a16:creationId xmlns:a16="http://schemas.microsoft.com/office/drawing/2014/main" id="{A897A648-377C-47A9-8F6A-6A3355E15607}"/>
               </a:ext>
             </a:extLst>
           </p:cNvPr>
@@ -8153,7 +8153,7 @@
           <p:cNvPr id="9" name="">
             <a:extLst xmlns:a="http://schemas.openxmlformats.org/drawingml/2006/main">
               <a:ext uri="{FF2B5EF4-FFF2-40B4-BE49-F238E27FC236}">
-                <a16:creationId xmlns:a16="http://schemas.microsoft.com/office/drawing/2014/main" id="{87C92E32-8112-464E-AD55-EE3758C700F5}"/>
+                <a16:creationId xmlns:a16="http://schemas.microsoft.com/office/drawing/2014/main" id="{38E67D91-5DB0-4439-A19F-FA185E02DC8D}"/>
               </a:ext>
             </a:extLst>
           </p:cNvPr>
@@ -8210,19 +8210,19 @@
           <p:cNvPr id="10" name="">
             <a:extLst xmlns:a="http://schemas.openxmlformats.org/drawingml/2006/main">
               <a:ext uri="{FF2B5EF4-FFF2-40B4-BE49-F238E27FC236}">
-                <a16:creationId xmlns:a16="http://schemas.microsoft.com/office/drawing/2014/main" id="{1C30FC2B-6862-4039-BB2C-8210DA1BD2F3}"/>
-              </a:ext>
-            </a:extLst>
-          </p:cNvPr>
-          <p:cNvSpPr>
-            <a:spLocks xmlns:a="http://schemas.openxmlformats.org/drawingml/2006/main" noGrp="1"/>
-          </p:cNvSpPr>
-          <p:nvPr/>
-        </p:nvSpPr>
-        <p:spPr>
-          <a:xfrm xmlns:a="http://schemas.openxmlformats.org/drawingml/2006/main">
-            <a:off x="914400" y="1257300"/>
-            <a:ext cx="10363200" cy="781050"/>
+                <a16:creationId xmlns:a16="http://schemas.microsoft.com/office/drawing/2014/main" id="{74143246-EF4B-4D54-BAAF-9C3DAA4A698D}"/>
+              </a:ext>
+            </a:extLst>
+          </p:cNvPr>
+          <p:cNvSpPr>
+            <a:spLocks xmlns:a="http://schemas.openxmlformats.org/drawingml/2006/main" noGrp="1"/>
+          </p:cNvSpPr>
+          <p:nvPr/>
+        </p:nvSpPr>
+        <p:spPr>
+          <a:xfrm xmlns:a="http://schemas.openxmlformats.org/drawingml/2006/main">
+            <a:off x="857250" y="1219200"/>
+            <a:ext cx="10477500" cy="742950"/>
           </a:xfrm>
           <a:prstGeom xmlns:a="http://schemas.openxmlformats.org/drawingml/2006/main" prst="rect">
             <a:avLst/>
@@ -8239,7 +8239,7 @@
           <a:lstStyle xmlns:a="http://schemas.openxmlformats.org/drawingml/2006/main"/>
           <a:p xmlns:a="http://schemas.openxmlformats.org/drawingml/2006/main">
             <a:pPr algn="ctr">
-              <a:defRPr sz="2175" b="1">
+              <a:defRPr sz="2100" b="1">
                 <a:solidFill>
                   <a:srgbClr val="17253A"/>
                 </a:solidFill>
@@ -8249,7 +8249,7 @@
               </a:defRPr>
             </a:pPr>
             <a:r>
-              <a:rPr sz="2175" b="1">
+              <a:rPr sz="2100" b="1">
                 <a:solidFill>
                   <a:srgbClr val="17253A"/>
                 </a:solidFill>
@@ -8267,28 +8267,30 @@
           <p:cNvPr id="11" name="">
             <a:extLst xmlns:a="http://schemas.openxmlformats.org/drawingml/2006/main">
               <a:ext uri="{FF2B5EF4-FFF2-40B4-BE49-F238E27FC236}">
-                <a16:creationId xmlns:a16="http://schemas.microsoft.com/office/drawing/2014/main" id="{286ED229-9E47-4149-A017-B065A553179E}"/>
-              </a:ext>
-            </a:extLst>
-          </p:cNvPr>
-          <p:cNvSpPr>
-            <a:spLocks xmlns:a="http://schemas.openxmlformats.org/drawingml/2006/main" noGrp="1"/>
-          </p:cNvSpPr>
-          <p:nvPr/>
-        </p:nvSpPr>
-        <p:spPr>
-          <a:xfrm xmlns:a="http://schemas.openxmlformats.org/drawingml/2006/main">
-            <a:off x="1000125" y="2247900"/>
-            <a:ext cx="476250" cy="476250"/>
-          </a:xfrm>
-          <a:prstGeom xmlns:a="http://schemas.openxmlformats.org/drawingml/2006/main" prst="ellipse">
+                <a16:creationId xmlns:a16="http://schemas.microsoft.com/office/drawing/2014/main" id="{0DAAE5C7-288A-41CC-8C3E-421F8FB52F36}"/>
+              </a:ext>
+            </a:extLst>
+          </p:cNvPr>
+          <p:cNvSpPr>
+            <a:spLocks xmlns:a="http://schemas.openxmlformats.org/drawingml/2006/main" noGrp="1"/>
+          </p:cNvSpPr>
+          <p:nvPr/>
+        </p:nvSpPr>
+        <p:spPr>
+          <a:xfrm xmlns:a="http://schemas.openxmlformats.org/drawingml/2006/main">
+            <a:off x="971550" y="2124075"/>
+            <a:ext cx="38100" cy="3524250"/>
+          </a:xfrm>
+          <a:prstGeom xmlns:a="http://schemas.openxmlformats.org/drawingml/2006/main" prst="rect">
             <a:avLst/>
           </a:prstGeom>
           <a:solidFill xmlns:a="http://schemas.openxmlformats.org/drawingml/2006/main">
-            <a:srgbClr val="18324A"/>
+            <a:srgbClr val="2C6E73"/>
           </a:solidFill>
           <a:ln xmlns:a="http://schemas.openxmlformats.org/drawingml/2006/main" w="0">
-            <a:noFill/>
+            <a:solidFill>
+              <a:srgbClr val="2C6E73"/>
+            </a:solidFill>
           </a:ln>
         </p:spPr>
       </p:sp>
@@ -8297,19 +8299,19 @@
           <p:cNvPr id="12" name="">
             <a:extLst xmlns:a="http://schemas.openxmlformats.org/drawingml/2006/main">
               <a:ext uri="{FF2B5EF4-FFF2-40B4-BE49-F238E27FC236}">
-                <a16:creationId xmlns:a16="http://schemas.microsoft.com/office/drawing/2014/main" id="{413F8D84-0585-4CEF-AF84-D1D7993BB440}"/>
-              </a:ext>
-            </a:extLst>
-          </p:cNvPr>
-          <p:cNvSpPr>
-            <a:spLocks xmlns:a="http://schemas.openxmlformats.org/drawingml/2006/main" noGrp="1"/>
-          </p:cNvSpPr>
-          <p:nvPr/>
-        </p:nvSpPr>
-        <p:spPr>
-          <a:xfrm xmlns:a="http://schemas.openxmlformats.org/drawingml/2006/main">
-            <a:off x="1000125" y="2276475"/>
-            <a:ext cx="476250" cy="419100"/>
+                <a16:creationId xmlns:a16="http://schemas.microsoft.com/office/drawing/2014/main" id="{4A6ABC0C-B375-42BD-BF01-3D8EBAB63C22}"/>
+              </a:ext>
+            </a:extLst>
+          </p:cNvPr>
+          <p:cNvSpPr>
+            <a:spLocks xmlns:a="http://schemas.openxmlformats.org/drawingml/2006/main" noGrp="1"/>
+          </p:cNvSpPr>
+          <p:nvPr/>
+        </p:nvSpPr>
+        <p:spPr>
+          <a:xfrm xmlns:a="http://schemas.openxmlformats.org/drawingml/2006/main">
+            <a:off x="1162050" y="2200275"/>
+            <a:ext cx="400050" cy="400050"/>
           </a:xfrm>
           <a:prstGeom xmlns:a="http://schemas.openxmlformats.org/drawingml/2006/main" prst="rect">
             <a:avLst/>
@@ -8326,9 +8328,9 @@
           <a:lstStyle xmlns:a="http://schemas.openxmlformats.org/drawingml/2006/main"/>
           <a:p xmlns:a="http://schemas.openxmlformats.org/drawingml/2006/main">
             <a:pPr algn="ctr">
-              <a:defRPr sz="1350" b="1">
-                <a:solidFill>
-                  <a:srgbClr val="FFFFFF"/>
+              <a:defRPr sz="1125" b="1">
+                <a:solidFill>
+                  <a:srgbClr val="2C6E73"/>
                 </a:solidFill>
                 <a:latin typeface="Arial"/>
                 <a:ea typeface="Arial"/>
@@ -8336,9 +8338,9 @@
               </a:defRPr>
             </a:pPr>
             <a:r>
-              <a:rPr sz="1350" b="1">
-                <a:solidFill>
-                  <a:srgbClr val="FFFFFF"/>
+              <a:rPr sz="1125" b="1">
+                <a:solidFill>
+                  <a:srgbClr val="2C6E73"/>
                 </a:solidFill>
                 <a:latin typeface="Arial"/>
                 <a:ea typeface="Arial"/>
@@ -8354,19 +8356,19 @@
           <p:cNvPr id="13" name="">
             <a:extLst xmlns:a="http://schemas.openxmlformats.org/drawingml/2006/main">
               <a:ext uri="{FF2B5EF4-FFF2-40B4-BE49-F238E27FC236}">
-                <a16:creationId xmlns:a16="http://schemas.microsoft.com/office/drawing/2014/main" id="{2716A4D2-FF64-40D8-8A09-7A1B557DBFDF}"/>
-              </a:ext>
-            </a:extLst>
-          </p:cNvPr>
-          <p:cNvSpPr>
-            <a:spLocks xmlns:a="http://schemas.openxmlformats.org/drawingml/2006/main" noGrp="1"/>
-          </p:cNvSpPr>
-          <p:nvPr/>
-        </p:nvSpPr>
-        <p:spPr>
-          <a:xfrm xmlns:a="http://schemas.openxmlformats.org/drawingml/2006/main">
-            <a:off x="1714500" y="2181225"/>
-            <a:ext cx="9429750" cy="609600"/>
+                <a16:creationId xmlns:a16="http://schemas.microsoft.com/office/drawing/2014/main" id="{5F39510A-8F53-4C97-B186-F4436CFDC675}"/>
+              </a:ext>
+            </a:extLst>
+          </p:cNvPr>
+          <p:cNvSpPr>
+            <a:spLocks xmlns:a="http://schemas.openxmlformats.org/drawingml/2006/main" noGrp="1"/>
+          </p:cNvSpPr>
+          <p:nvPr/>
+        </p:nvSpPr>
+        <p:spPr>
+          <a:xfrm xmlns:a="http://schemas.openxmlformats.org/drawingml/2006/main">
+            <a:off x="1714500" y="2114550"/>
+            <a:ext cx="9525000" cy="638175"/>
           </a:xfrm>
           <a:prstGeom xmlns:a="http://schemas.openxmlformats.org/drawingml/2006/main" prst="rect">
             <a:avLst/>
@@ -8383,7 +8385,7 @@
           <a:lstStyle xmlns:a="http://schemas.openxmlformats.org/drawingml/2006/main"/>
           <a:p xmlns:a="http://schemas.openxmlformats.org/drawingml/2006/main">
             <a:pPr algn="l">
-              <a:defRPr sz="1500" b="0">
+              <a:defRPr sz="1575" b="0">
                 <a:solidFill>
                   <a:srgbClr val="17253A"/>
                 </a:solidFill>
@@ -8393,7 +8395,7 @@
               </a:defRPr>
             </a:pPr>
             <a:r>
-              <a:rPr sz="1500" b="0">
+              <a:rPr sz="1575" b="0">
                 <a:solidFill>
                   <a:srgbClr val="17253A"/>
                 </a:solidFill>
@@ -8401,7 +8403,7 @@
                 <a:ea typeface="Arial"/>
                 <a:cs typeface="Arial"/>
               </a:rPr>
-              <a:t>Identify the structure: Choose a representation out of 100 or use division.</a:t>
+              <a:t>7/20</a:t>
             </a:r>
           </a:p>
         </p:txBody>
@@ -8411,28 +8413,30 @@
           <p:cNvPr id="14" name="">
             <a:extLst xmlns:a="http://schemas.openxmlformats.org/drawingml/2006/main">
               <a:ext uri="{FF2B5EF4-FFF2-40B4-BE49-F238E27FC236}">
-                <a16:creationId xmlns:a16="http://schemas.microsoft.com/office/drawing/2014/main" id="{BDD05BB8-3E1A-4AF7-A618-7BB6EDAD2C8D}"/>
-              </a:ext>
-            </a:extLst>
-          </p:cNvPr>
-          <p:cNvSpPr>
-            <a:spLocks xmlns:a="http://schemas.openxmlformats.org/drawingml/2006/main" noGrp="1"/>
-          </p:cNvSpPr>
-          <p:nvPr/>
-        </p:nvSpPr>
-        <p:spPr>
-          <a:xfrm xmlns:a="http://schemas.openxmlformats.org/drawingml/2006/main">
-            <a:off x="1000125" y="2990850"/>
-            <a:ext cx="476250" cy="476250"/>
-          </a:xfrm>
-          <a:prstGeom xmlns:a="http://schemas.openxmlformats.org/drawingml/2006/main" prst="ellipse">
+                <a16:creationId xmlns:a16="http://schemas.microsoft.com/office/drawing/2014/main" id="{7B3AA229-4B58-4BCE-8372-3A006C3DB1FF}"/>
+              </a:ext>
+            </a:extLst>
+          </p:cNvPr>
+          <p:cNvSpPr>
+            <a:spLocks xmlns:a="http://schemas.openxmlformats.org/drawingml/2006/main" noGrp="1"/>
+          </p:cNvSpPr>
+          <p:nvPr/>
+        </p:nvSpPr>
+        <p:spPr>
+          <a:xfrm xmlns:a="http://schemas.openxmlformats.org/drawingml/2006/main">
+            <a:off x="1714500" y="2771775"/>
+            <a:ext cx="9334500" cy="9525"/>
+          </a:xfrm>
+          <a:prstGeom xmlns:a="http://schemas.openxmlformats.org/drawingml/2006/main" prst="rect">
             <a:avLst/>
           </a:prstGeom>
           <a:solidFill xmlns:a="http://schemas.openxmlformats.org/drawingml/2006/main">
-            <a:srgbClr val="2C6E73"/>
+            <a:srgbClr val="D9E0E6"/>
           </a:solidFill>
           <a:ln xmlns:a="http://schemas.openxmlformats.org/drawingml/2006/main" w="0">
-            <a:noFill/>
+            <a:solidFill>
+              <a:srgbClr val="D9E0E6"/>
+            </a:solidFill>
           </a:ln>
         </p:spPr>
       </p:sp>
@@ -8441,19 +8445,19 @@
           <p:cNvPr id="15" name="">
             <a:extLst xmlns:a="http://schemas.openxmlformats.org/drawingml/2006/main">
               <a:ext uri="{FF2B5EF4-FFF2-40B4-BE49-F238E27FC236}">
-                <a16:creationId xmlns:a16="http://schemas.microsoft.com/office/drawing/2014/main" id="{95A979CD-E07C-435F-908E-0F6594078559}"/>
-              </a:ext>
-            </a:extLst>
-          </p:cNvPr>
-          <p:cNvSpPr>
-            <a:spLocks xmlns:a="http://schemas.openxmlformats.org/drawingml/2006/main" noGrp="1"/>
-          </p:cNvSpPr>
-          <p:nvPr/>
-        </p:nvSpPr>
-        <p:spPr>
-          <a:xfrm xmlns:a="http://schemas.openxmlformats.org/drawingml/2006/main">
-            <a:off x="1000125" y="3019425"/>
-            <a:ext cx="476250" cy="419100"/>
+                <a16:creationId xmlns:a16="http://schemas.microsoft.com/office/drawing/2014/main" id="{2E4A54CB-8E85-4748-99D9-9A95CAE268C8}"/>
+              </a:ext>
+            </a:extLst>
+          </p:cNvPr>
+          <p:cNvSpPr>
+            <a:spLocks xmlns:a="http://schemas.openxmlformats.org/drawingml/2006/main" noGrp="1"/>
+          </p:cNvSpPr>
+          <p:nvPr/>
+        </p:nvSpPr>
+        <p:spPr>
+          <a:xfrm xmlns:a="http://schemas.openxmlformats.org/drawingml/2006/main">
+            <a:off x="1162050" y="2905125"/>
+            <a:ext cx="400050" cy="400050"/>
           </a:xfrm>
           <a:prstGeom xmlns:a="http://schemas.openxmlformats.org/drawingml/2006/main" prst="rect">
             <a:avLst/>
@@ -8470,9 +8474,9 @@
           <a:lstStyle xmlns:a="http://schemas.openxmlformats.org/drawingml/2006/main"/>
           <a:p xmlns:a="http://schemas.openxmlformats.org/drawingml/2006/main">
             <a:pPr algn="ctr">
-              <a:defRPr sz="1350" b="1">
-                <a:solidFill>
-                  <a:srgbClr val="FFFFFF"/>
+              <a:defRPr sz="1125" b="1">
+                <a:solidFill>
+                  <a:srgbClr val="2C6E73"/>
                 </a:solidFill>
                 <a:latin typeface="Arial"/>
                 <a:ea typeface="Arial"/>
@@ -8480,9 +8484,9 @@
               </a:defRPr>
             </a:pPr>
             <a:r>
-              <a:rPr sz="1350" b="1">
-                <a:solidFill>
-                  <a:srgbClr val="FFFFFF"/>
+              <a:rPr sz="1125" b="1">
+                <a:solidFill>
+                  <a:srgbClr val="2C6E73"/>
                 </a:solidFill>
                 <a:latin typeface="Arial"/>
                 <a:ea typeface="Arial"/>
@@ -8498,19 +8502,19 @@
           <p:cNvPr id="16" name="">
             <a:extLst xmlns:a="http://schemas.openxmlformats.org/drawingml/2006/main">
               <a:ext uri="{FF2B5EF4-FFF2-40B4-BE49-F238E27FC236}">
-                <a16:creationId xmlns:a16="http://schemas.microsoft.com/office/drawing/2014/main" id="{7BC5BC11-4612-4015-BC5E-014092711CF7}"/>
-              </a:ext>
-            </a:extLst>
-          </p:cNvPr>
-          <p:cNvSpPr>
-            <a:spLocks xmlns:a="http://schemas.openxmlformats.org/drawingml/2006/main" noGrp="1"/>
-          </p:cNvSpPr>
-          <p:nvPr/>
-        </p:nvSpPr>
-        <p:spPr>
-          <a:xfrm xmlns:a="http://schemas.openxmlformats.org/drawingml/2006/main">
-            <a:off x="1714500" y="2924175"/>
-            <a:ext cx="9429750" cy="609600"/>
+                <a16:creationId xmlns:a16="http://schemas.microsoft.com/office/drawing/2014/main" id="{C2F41F56-CE96-4D47-9962-82E0D438ABBB}"/>
+              </a:ext>
+            </a:extLst>
+          </p:cNvPr>
+          <p:cNvSpPr>
+            <a:spLocks xmlns:a="http://schemas.openxmlformats.org/drawingml/2006/main" noGrp="1"/>
+          </p:cNvSpPr>
+          <p:nvPr/>
+        </p:nvSpPr>
+        <p:spPr>
+          <a:xfrm xmlns:a="http://schemas.openxmlformats.org/drawingml/2006/main">
+            <a:off x="1714500" y="2819400"/>
+            <a:ext cx="9525000" cy="638175"/>
           </a:xfrm>
           <a:prstGeom xmlns:a="http://schemas.openxmlformats.org/drawingml/2006/main" prst="rect">
             <a:avLst/>
@@ -8527,7 +8531,7 @@
           <a:lstStyle xmlns:a="http://schemas.openxmlformats.org/drawingml/2006/main"/>
           <a:p xmlns:a="http://schemas.openxmlformats.org/drawingml/2006/main">
             <a:pPr algn="l">
-              <a:defRPr sz="1500" b="0">
+              <a:defRPr sz="1575" b="0">
                 <a:solidFill>
                   <a:srgbClr val="17253A"/>
                 </a:solidFill>
@@ -8537,7 +8541,7 @@
               </a:defRPr>
             </a:pPr>
             <a:r>
-              <a:rPr sz="1500" b="0">
+              <a:rPr sz="1575" b="0">
                 <a:solidFill>
                   <a:srgbClr val="17253A"/>
                 </a:solidFill>
@@ -8545,7 +8549,7 @@
                 <a:ea typeface="Arial"/>
                 <a:cs typeface="Arial"/>
               </a:rPr>
-              <a:t>Set up the method: Convert carefully while preserving the value.</a:t>
+              <a:t>Make the denominator 100: 20 × 5 = 100</a:t>
             </a:r>
           </a:p>
         </p:txBody>
@@ -8555,28 +8559,30 @@
           <p:cNvPr id="17" name="">
             <a:extLst xmlns:a="http://schemas.openxmlformats.org/drawingml/2006/main">
               <a:ext uri="{FF2B5EF4-FFF2-40B4-BE49-F238E27FC236}">
-                <a16:creationId xmlns:a16="http://schemas.microsoft.com/office/drawing/2014/main" id="{B9853699-1C01-431D-A8DB-A4F64EB90110}"/>
-              </a:ext>
-            </a:extLst>
-          </p:cNvPr>
-          <p:cNvSpPr>
-            <a:spLocks xmlns:a="http://schemas.openxmlformats.org/drawingml/2006/main" noGrp="1"/>
-          </p:cNvSpPr>
-          <p:nvPr/>
-        </p:nvSpPr>
-        <p:spPr>
-          <a:xfrm xmlns:a="http://schemas.openxmlformats.org/drawingml/2006/main">
-            <a:off x="1000125" y="3733800"/>
-            <a:ext cx="476250" cy="476250"/>
-          </a:xfrm>
-          <a:prstGeom xmlns:a="http://schemas.openxmlformats.org/drawingml/2006/main" prst="ellipse">
+                <a16:creationId xmlns:a16="http://schemas.microsoft.com/office/drawing/2014/main" id="{A7198D27-42F2-446D-8277-098B108E9A74}"/>
+              </a:ext>
+            </a:extLst>
+          </p:cNvPr>
+          <p:cNvSpPr>
+            <a:spLocks xmlns:a="http://schemas.openxmlformats.org/drawingml/2006/main" noGrp="1"/>
+          </p:cNvSpPr>
+          <p:nvPr/>
+        </p:nvSpPr>
+        <p:spPr>
+          <a:xfrm xmlns:a="http://schemas.openxmlformats.org/drawingml/2006/main">
+            <a:off x="1714500" y="3476625"/>
+            <a:ext cx="9334500" cy="9525"/>
+          </a:xfrm>
+          <a:prstGeom xmlns:a="http://schemas.openxmlformats.org/drawingml/2006/main" prst="rect">
             <a:avLst/>
           </a:prstGeom>
           <a:solidFill xmlns:a="http://schemas.openxmlformats.org/drawingml/2006/main">
-            <a:srgbClr val="2C6E73"/>
+            <a:srgbClr val="D9E0E6"/>
           </a:solidFill>
           <a:ln xmlns:a="http://schemas.openxmlformats.org/drawingml/2006/main" w="0">
-            <a:noFill/>
+            <a:solidFill>
+              <a:srgbClr val="D9E0E6"/>
+            </a:solidFill>
           </a:ln>
         </p:spPr>
       </p:sp>
@@ -8585,19 +8591,19 @@
           <p:cNvPr id="18" name="">
             <a:extLst xmlns:a="http://schemas.openxmlformats.org/drawingml/2006/main">
               <a:ext uri="{FF2B5EF4-FFF2-40B4-BE49-F238E27FC236}">
-                <a16:creationId xmlns:a16="http://schemas.microsoft.com/office/drawing/2014/main" id="{447A26F1-B69A-4926-93E2-A23E3B36E3D7}"/>
-              </a:ext>
-            </a:extLst>
-          </p:cNvPr>
-          <p:cNvSpPr>
-            <a:spLocks xmlns:a="http://schemas.openxmlformats.org/drawingml/2006/main" noGrp="1"/>
-          </p:cNvSpPr>
-          <p:nvPr/>
-        </p:nvSpPr>
-        <p:spPr>
-          <a:xfrm xmlns:a="http://schemas.openxmlformats.org/drawingml/2006/main">
-            <a:off x="1000125" y="3762375"/>
-            <a:ext cx="476250" cy="419100"/>
+                <a16:creationId xmlns:a16="http://schemas.microsoft.com/office/drawing/2014/main" id="{8FF9AC27-E76E-4D79-999F-53DCDF2C01A5}"/>
+              </a:ext>
+            </a:extLst>
+          </p:cNvPr>
+          <p:cNvSpPr>
+            <a:spLocks xmlns:a="http://schemas.openxmlformats.org/drawingml/2006/main" noGrp="1"/>
+          </p:cNvSpPr>
+          <p:nvPr/>
+        </p:nvSpPr>
+        <p:spPr>
+          <a:xfrm xmlns:a="http://schemas.openxmlformats.org/drawingml/2006/main">
+            <a:off x="1162050" y="3609975"/>
+            <a:ext cx="400050" cy="400050"/>
           </a:xfrm>
           <a:prstGeom xmlns:a="http://schemas.openxmlformats.org/drawingml/2006/main" prst="rect">
             <a:avLst/>
@@ -8614,9 +8620,9 @@
           <a:lstStyle xmlns:a="http://schemas.openxmlformats.org/drawingml/2006/main"/>
           <a:p xmlns:a="http://schemas.openxmlformats.org/drawingml/2006/main">
             <a:pPr algn="ctr">
-              <a:defRPr sz="1350" b="1">
-                <a:solidFill>
-                  <a:srgbClr val="FFFFFF"/>
+              <a:defRPr sz="1125" b="1">
+                <a:solidFill>
+                  <a:srgbClr val="2C6E73"/>
                 </a:solidFill>
                 <a:latin typeface="Arial"/>
                 <a:ea typeface="Arial"/>
@@ -8624,9 +8630,9 @@
               </a:defRPr>
             </a:pPr>
             <a:r>
-              <a:rPr sz="1350" b="1">
-                <a:solidFill>
-                  <a:srgbClr val="FFFFFF"/>
+              <a:rPr sz="1125" b="1">
+                <a:solidFill>
+                  <a:srgbClr val="2C6E73"/>
                 </a:solidFill>
                 <a:latin typeface="Arial"/>
                 <a:ea typeface="Arial"/>
@@ -8642,19 +8648,19 @@
           <p:cNvPr id="19" name="">
             <a:extLst xmlns:a="http://schemas.openxmlformats.org/drawingml/2006/main">
               <a:ext uri="{FF2B5EF4-FFF2-40B4-BE49-F238E27FC236}">
-                <a16:creationId xmlns:a16="http://schemas.microsoft.com/office/drawing/2014/main" id="{5270264F-DAA1-4F38-9A4B-778EA56E935C}"/>
-              </a:ext>
-            </a:extLst>
-          </p:cNvPr>
-          <p:cNvSpPr>
-            <a:spLocks xmlns:a="http://schemas.openxmlformats.org/drawingml/2006/main" noGrp="1"/>
-          </p:cNvSpPr>
-          <p:nvPr/>
-        </p:nvSpPr>
-        <p:spPr>
-          <a:xfrm xmlns:a="http://schemas.openxmlformats.org/drawingml/2006/main">
-            <a:off x="1714500" y="3667125"/>
-            <a:ext cx="9429750" cy="609600"/>
+                <a16:creationId xmlns:a16="http://schemas.microsoft.com/office/drawing/2014/main" id="{630FFD98-2117-4A05-ABF3-61C0BDD3D9F0}"/>
+              </a:ext>
+            </a:extLst>
+          </p:cNvPr>
+          <p:cNvSpPr>
+            <a:spLocks xmlns:a="http://schemas.openxmlformats.org/drawingml/2006/main" noGrp="1"/>
+          </p:cNvSpPr>
+          <p:nvPr/>
+        </p:nvSpPr>
+        <p:spPr>
+          <a:xfrm xmlns:a="http://schemas.openxmlformats.org/drawingml/2006/main">
+            <a:off x="1714500" y="3524250"/>
+            <a:ext cx="9525000" cy="638175"/>
           </a:xfrm>
           <a:prstGeom xmlns:a="http://schemas.openxmlformats.org/drawingml/2006/main" prst="rect">
             <a:avLst/>
@@ -8671,7 +8677,7 @@
           <a:lstStyle xmlns:a="http://schemas.openxmlformats.org/drawingml/2006/main"/>
           <a:p xmlns:a="http://schemas.openxmlformats.org/drawingml/2006/main">
             <a:pPr algn="l">
-              <a:defRPr sz="1500" b="0">
+              <a:defRPr sz="1575" b="0">
                 <a:solidFill>
                   <a:srgbClr val="17253A"/>
                 </a:solidFill>
@@ -8681,7 +8687,7 @@
               </a:defRPr>
             </a:pPr>
             <a:r>
-              <a:rPr sz="1500" b="0">
+              <a:rPr sz="1575" b="0">
                 <a:solidFill>
                   <a:srgbClr val="17253A"/>
                 </a:solidFill>
@@ -8689,7 +8695,7 @@
                 <a:ea typeface="Arial"/>
                 <a:cs typeface="Arial"/>
               </a:rPr>
-              <a:t>Complete the calculation: 0.35.</a:t>
+              <a:t>7 × 5 = 35</a:t>
             </a:r>
           </a:p>
         </p:txBody>
@@ -8699,28 +8705,30 @@
           <p:cNvPr id="20" name="">
             <a:extLst xmlns:a="http://schemas.openxmlformats.org/drawingml/2006/main">
               <a:ext uri="{FF2B5EF4-FFF2-40B4-BE49-F238E27FC236}">
-                <a16:creationId xmlns:a16="http://schemas.microsoft.com/office/drawing/2014/main" id="{08921563-0CED-4D5E-B720-F7CBAAAD2F84}"/>
-              </a:ext>
-            </a:extLst>
-          </p:cNvPr>
-          <p:cNvSpPr>
-            <a:spLocks xmlns:a="http://schemas.openxmlformats.org/drawingml/2006/main" noGrp="1"/>
-          </p:cNvSpPr>
-          <p:nvPr/>
-        </p:nvSpPr>
-        <p:spPr>
-          <a:xfrm xmlns:a="http://schemas.openxmlformats.org/drawingml/2006/main">
-            <a:off x="1000125" y="4476750"/>
-            <a:ext cx="476250" cy="476250"/>
-          </a:xfrm>
-          <a:prstGeom xmlns:a="http://schemas.openxmlformats.org/drawingml/2006/main" prst="ellipse">
+                <a16:creationId xmlns:a16="http://schemas.microsoft.com/office/drawing/2014/main" id="{92334FDA-39AA-4671-BFAA-E13AC9B16FDF}"/>
+              </a:ext>
+            </a:extLst>
+          </p:cNvPr>
+          <p:cNvSpPr>
+            <a:spLocks xmlns:a="http://schemas.openxmlformats.org/drawingml/2006/main" noGrp="1"/>
+          </p:cNvSpPr>
+          <p:nvPr/>
+        </p:nvSpPr>
+        <p:spPr>
+          <a:xfrm xmlns:a="http://schemas.openxmlformats.org/drawingml/2006/main">
+            <a:off x="1714500" y="4181475"/>
+            <a:ext cx="9334500" cy="9525"/>
+          </a:xfrm>
+          <a:prstGeom xmlns:a="http://schemas.openxmlformats.org/drawingml/2006/main" prst="rect">
             <a:avLst/>
           </a:prstGeom>
           <a:solidFill xmlns:a="http://schemas.openxmlformats.org/drawingml/2006/main">
-            <a:srgbClr val="2C6E73"/>
+            <a:srgbClr val="D9E0E6"/>
           </a:solidFill>
           <a:ln xmlns:a="http://schemas.openxmlformats.org/drawingml/2006/main" w="0">
-            <a:noFill/>
+            <a:solidFill>
+              <a:srgbClr val="D9E0E6"/>
+            </a:solidFill>
           </a:ln>
         </p:spPr>
       </p:sp>
@@ -8729,19 +8737,19 @@
           <p:cNvPr id="21" name="">
             <a:extLst xmlns:a="http://schemas.openxmlformats.org/drawingml/2006/main">
               <a:ext uri="{FF2B5EF4-FFF2-40B4-BE49-F238E27FC236}">
-                <a16:creationId xmlns:a16="http://schemas.microsoft.com/office/drawing/2014/main" id="{6BF29D21-3726-4A14-9153-51DAAC2112F1}"/>
-              </a:ext>
-            </a:extLst>
-          </p:cNvPr>
-          <p:cNvSpPr>
-            <a:spLocks xmlns:a="http://schemas.openxmlformats.org/drawingml/2006/main" noGrp="1"/>
-          </p:cNvSpPr>
-          <p:nvPr/>
-        </p:nvSpPr>
-        <p:spPr>
-          <a:xfrm xmlns:a="http://schemas.openxmlformats.org/drawingml/2006/main">
-            <a:off x="1000125" y="4505325"/>
-            <a:ext cx="476250" cy="419100"/>
+                <a16:creationId xmlns:a16="http://schemas.microsoft.com/office/drawing/2014/main" id="{C75E54A0-3C19-424A-AFB9-411A825DE06E}"/>
+              </a:ext>
+            </a:extLst>
+          </p:cNvPr>
+          <p:cNvSpPr>
+            <a:spLocks xmlns:a="http://schemas.openxmlformats.org/drawingml/2006/main" noGrp="1"/>
+          </p:cNvSpPr>
+          <p:nvPr/>
+        </p:nvSpPr>
+        <p:spPr>
+          <a:xfrm xmlns:a="http://schemas.openxmlformats.org/drawingml/2006/main">
+            <a:off x="1162050" y="4314825"/>
+            <a:ext cx="400050" cy="400050"/>
           </a:xfrm>
           <a:prstGeom xmlns:a="http://schemas.openxmlformats.org/drawingml/2006/main" prst="rect">
             <a:avLst/>
@@ -8758,9 +8766,9 @@
           <a:lstStyle xmlns:a="http://schemas.openxmlformats.org/drawingml/2006/main"/>
           <a:p xmlns:a="http://schemas.openxmlformats.org/drawingml/2006/main">
             <a:pPr algn="ctr">
-              <a:defRPr sz="1350" b="1">
-                <a:solidFill>
-                  <a:srgbClr val="FFFFFF"/>
+              <a:defRPr sz="1125" b="1">
+                <a:solidFill>
+                  <a:srgbClr val="2C6E73"/>
                 </a:solidFill>
                 <a:latin typeface="Arial"/>
                 <a:ea typeface="Arial"/>
@@ -8768,9 +8776,9 @@
               </a:defRPr>
             </a:pPr>
             <a:r>
-              <a:rPr sz="1350" b="1">
-                <a:solidFill>
-                  <a:srgbClr val="FFFFFF"/>
+              <a:rPr sz="1125" b="1">
+                <a:solidFill>
+                  <a:srgbClr val="2C6E73"/>
                 </a:solidFill>
                 <a:latin typeface="Arial"/>
                 <a:ea typeface="Arial"/>
@@ -8786,19 +8794,19 @@
           <p:cNvPr id="22" name="">
             <a:extLst xmlns:a="http://schemas.openxmlformats.org/drawingml/2006/main">
               <a:ext uri="{FF2B5EF4-FFF2-40B4-BE49-F238E27FC236}">
-                <a16:creationId xmlns:a16="http://schemas.microsoft.com/office/drawing/2014/main" id="{3B5744C1-5FAD-4428-97CD-159BB4232848}"/>
-              </a:ext>
-            </a:extLst>
-          </p:cNvPr>
-          <p:cNvSpPr>
-            <a:spLocks xmlns:a="http://schemas.openxmlformats.org/drawingml/2006/main" noGrp="1"/>
-          </p:cNvSpPr>
-          <p:nvPr/>
-        </p:nvSpPr>
-        <p:spPr>
-          <a:xfrm xmlns:a="http://schemas.openxmlformats.org/drawingml/2006/main">
-            <a:off x="1714500" y="4410075"/>
-            <a:ext cx="9429750" cy="609600"/>
+                <a16:creationId xmlns:a16="http://schemas.microsoft.com/office/drawing/2014/main" id="{2C0345D5-3F75-4841-8500-10C01785FBF5}"/>
+              </a:ext>
+            </a:extLst>
+          </p:cNvPr>
+          <p:cNvSpPr>
+            <a:spLocks xmlns:a="http://schemas.openxmlformats.org/drawingml/2006/main" noGrp="1"/>
+          </p:cNvSpPr>
+          <p:nvPr/>
+        </p:nvSpPr>
+        <p:spPr>
+          <a:xfrm xmlns:a="http://schemas.openxmlformats.org/drawingml/2006/main">
+            <a:off x="1714500" y="4229100"/>
+            <a:ext cx="9525000" cy="638175"/>
           </a:xfrm>
           <a:prstGeom xmlns:a="http://schemas.openxmlformats.org/drawingml/2006/main" prst="rect">
             <a:avLst/>
@@ -8815,9 +8823,9 @@
           <a:lstStyle xmlns:a="http://schemas.openxmlformats.org/drawingml/2006/main"/>
           <a:p xmlns:a="http://schemas.openxmlformats.org/drawingml/2006/main">
             <a:pPr algn="l">
-              <a:defRPr sz="1500" b="1">
-                <a:solidFill>
-                  <a:srgbClr val="2F785D"/>
+              <a:defRPr sz="1575" b="0">
+                <a:solidFill>
+                  <a:srgbClr val="17253A"/>
                 </a:solidFill>
                 <a:latin typeface="Arial"/>
                 <a:ea typeface="Arial"/>
@@ -8825,15 +8833,161 @@
               </a:defRPr>
             </a:pPr>
             <a:r>
-              <a:rPr sz="1500" b="1">
+              <a:rPr sz="1575" b="0">
+                <a:solidFill>
+                  <a:srgbClr val="17253A"/>
+                </a:solidFill>
+                <a:latin typeface="Arial"/>
+                <a:ea typeface="Arial"/>
+                <a:cs typeface="Arial"/>
+              </a:rPr>
+              <a:t>7/20 = 35/100</a:t>
+            </a:r>
+          </a:p>
+        </p:txBody>
+      </p:sp>
+      <p:sp>
+        <p:nvSpPr>
+          <p:cNvPr id="23" name="">
+            <a:extLst xmlns:a="http://schemas.openxmlformats.org/drawingml/2006/main">
+              <a:ext uri="{FF2B5EF4-FFF2-40B4-BE49-F238E27FC236}">
+                <a16:creationId xmlns:a16="http://schemas.microsoft.com/office/drawing/2014/main" id="{5B6293D1-30D4-4220-8625-8682D8E54252}"/>
+              </a:ext>
+            </a:extLst>
+          </p:cNvPr>
+          <p:cNvSpPr>
+            <a:spLocks xmlns:a="http://schemas.openxmlformats.org/drawingml/2006/main" noGrp="1"/>
+          </p:cNvSpPr>
+          <p:nvPr/>
+        </p:nvSpPr>
+        <p:spPr>
+          <a:xfrm xmlns:a="http://schemas.openxmlformats.org/drawingml/2006/main">
+            <a:off x="1714500" y="4886325"/>
+            <a:ext cx="9334500" cy="9525"/>
+          </a:xfrm>
+          <a:prstGeom xmlns:a="http://schemas.openxmlformats.org/drawingml/2006/main" prst="rect">
+            <a:avLst/>
+          </a:prstGeom>
+          <a:solidFill xmlns:a="http://schemas.openxmlformats.org/drawingml/2006/main">
+            <a:srgbClr val="D9E0E6"/>
+          </a:solidFill>
+          <a:ln xmlns:a="http://schemas.openxmlformats.org/drawingml/2006/main" w="0">
+            <a:solidFill>
+              <a:srgbClr val="D9E0E6"/>
+            </a:solidFill>
+          </a:ln>
+        </p:spPr>
+      </p:sp>
+      <p:sp>
+        <p:nvSpPr>
+          <p:cNvPr id="24" name="">
+            <a:extLst xmlns:a="http://schemas.openxmlformats.org/drawingml/2006/main">
+              <a:ext uri="{FF2B5EF4-FFF2-40B4-BE49-F238E27FC236}">
+                <a16:creationId xmlns:a16="http://schemas.microsoft.com/office/drawing/2014/main" id="{F687CC5C-D70A-4668-8CD0-6FEECFE3FDD5}"/>
+              </a:ext>
+            </a:extLst>
+          </p:cNvPr>
+          <p:cNvSpPr>
+            <a:spLocks xmlns:a="http://schemas.openxmlformats.org/drawingml/2006/main" noGrp="1"/>
+          </p:cNvSpPr>
+          <p:nvPr/>
+        </p:nvSpPr>
+        <p:spPr>
+          <a:xfrm xmlns:a="http://schemas.openxmlformats.org/drawingml/2006/main">
+            <a:off x="1162050" y="5019675"/>
+            <a:ext cx="400050" cy="400050"/>
+          </a:xfrm>
+          <a:prstGeom xmlns:a="http://schemas.openxmlformats.org/drawingml/2006/main" prst="rect">
+            <a:avLst/>
+          </a:prstGeom>
+          <a:noFill xmlns:a="http://schemas.openxmlformats.org/drawingml/2006/main"/>
+          <a:ln xmlns:a="http://schemas.openxmlformats.org/drawingml/2006/main" w="0">
+            <a:noFill/>
+          </a:ln>
+        </p:spPr>
+        <p:txBody>
+          <a:bodyPr xmlns:a="http://schemas.openxmlformats.org/drawingml/2006/main" anchor="ctr">
+            <a:normAutofit fontScale="100000"/>
+          </a:bodyPr>
+          <a:lstStyle xmlns:a="http://schemas.openxmlformats.org/drawingml/2006/main"/>
+          <a:p xmlns:a="http://schemas.openxmlformats.org/drawingml/2006/main">
+            <a:pPr algn="ctr">
+              <a:defRPr sz="1125" b="1">
                 <a:solidFill>
                   <a:srgbClr val="2F785D"/>
                 </a:solidFill>
                 <a:latin typeface="Arial"/>
                 <a:ea typeface="Arial"/>
                 <a:cs typeface="Arial"/>
+              </a:defRPr>
+            </a:pPr>
+            <a:r>
+              <a:rPr sz="1125" b="1">
+                <a:solidFill>
+                  <a:srgbClr val="2F785D"/>
+                </a:solidFill>
+                <a:latin typeface="Arial"/>
+                <a:ea typeface="Arial"/>
+                <a:cs typeface="Arial"/>
               </a:rPr>
-              <a:t>Check the result: Check the three forms against a benchmark such as one half.</a:t>
+              <a:t>5</a:t>
+            </a:r>
+          </a:p>
+        </p:txBody>
+      </p:sp>
+      <p:sp>
+        <p:nvSpPr>
+          <p:cNvPr id="25" name="">
+            <a:extLst xmlns:a="http://schemas.openxmlformats.org/drawingml/2006/main">
+              <a:ext uri="{FF2B5EF4-FFF2-40B4-BE49-F238E27FC236}">
+                <a16:creationId xmlns:a16="http://schemas.microsoft.com/office/drawing/2014/main" id="{628D9F96-13E1-4C0E-A05E-3540516A0D0B}"/>
+              </a:ext>
+            </a:extLst>
+          </p:cNvPr>
+          <p:cNvSpPr>
+            <a:spLocks xmlns:a="http://schemas.openxmlformats.org/drawingml/2006/main" noGrp="1"/>
+          </p:cNvSpPr>
+          <p:nvPr/>
+        </p:nvSpPr>
+        <p:spPr>
+          <a:xfrm xmlns:a="http://schemas.openxmlformats.org/drawingml/2006/main">
+            <a:off x="1714500" y="4933950"/>
+            <a:ext cx="9525000" cy="638175"/>
+          </a:xfrm>
+          <a:prstGeom xmlns:a="http://schemas.openxmlformats.org/drawingml/2006/main" prst="rect">
+            <a:avLst/>
+          </a:prstGeom>
+          <a:noFill xmlns:a="http://schemas.openxmlformats.org/drawingml/2006/main"/>
+          <a:ln xmlns:a="http://schemas.openxmlformats.org/drawingml/2006/main" w="0">
+            <a:noFill/>
+          </a:ln>
+        </p:spPr>
+        <p:txBody>
+          <a:bodyPr xmlns:a="http://schemas.openxmlformats.org/drawingml/2006/main" anchor="ctr">
+            <a:normAutofit fontScale="100000"/>
+          </a:bodyPr>
+          <a:lstStyle xmlns:a="http://schemas.openxmlformats.org/drawingml/2006/main"/>
+          <a:p xmlns:a="http://schemas.openxmlformats.org/drawingml/2006/main">
+            <a:pPr algn="l">
+              <a:defRPr sz="1575" b="1">
+                <a:solidFill>
+                  <a:srgbClr val="2F785D"/>
+                </a:solidFill>
+                <a:latin typeface="Arial"/>
+                <a:ea typeface="Arial"/>
+                <a:cs typeface="Arial"/>
+              </a:defRPr>
+            </a:pPr>
+            <a:r>
+              <a:rPr sz="1575" b="1">
+                <a:solidFill>
+                  <a:srgbClr val="2F785D"/>
+                </a:solidFill>
+                <a:latin typeface="Arial"/>
+                <a:ea typeface="Arial"/>
+                <a:cs typeface="Arial"/>
+              </a:rPr>
+              <a:t>35/100 = 0.35</a:t>
             </a:r>
           </a:p>
         </p:txBody>
@@ -8841,7 +8995,7 @@
     </p:spTree>
     <p:extLst>
       <p:ext uri="{BB962C8B-B14F-4D97-AF65-F5344CB8AC3E}">
-        <p14:creationId xmlns:p14="http://schemas.microsoft.com/office/powerpoint/2010/main" val="513180163"/>
+        <p14:creationId xmlns:p14="http://schemas.microsoft.com/office/powerpoint/2010/main" val="1809140983"/>
       </p:ext>
     </p:extLst>
   </p:cSld>
@@ -9078,6 +9232,51 @@
                       </p:childTnLst>
                     </p:cTn>
                   </p:par>
+                  <p:par>
+                    <p:cTn id="23" fill="hold">
+                      <p:stCondLst>
+                        <p:cond delay="indefinite"/>
+                      </p:stCondLst>
+                      <p:childTnLst>
+                        <p:par>
+                          <p:cTn id="24" fill="hold">
+                            <p:stCondLst>
+                              <p:cond delay="0"/>
+                            </p:stCondLst>
+                            <p:childTnLst>
+                              <p:par>
+                                <p:cTn id="25" presetID="1" presetClass="entr" presetSubtype="0" fill="hold" grpId="0" nodeType="clickEffect">
+                                  <p:stCondLst>
+                                    <p:cond delay="0"/>
+                                  </p:stCondLst>
+                                  <p:childTnLst>
+                                    <p:set>
+                                      <p:cBhvr>
+                                        <p:cTn id="26" dur="1" fill="hold">
+                                          <p:stCondLst>
+                                            <p:cond delay="0"/>
+                                          </p:stCondLst>
+                                        </p:cTn>
+                                        <p:tgtEl>
+                                          <p:spTgt spid="25"/>
+                                        </p:tgtEl>
+                                        <p:attrNameLst>
+                                          <p:attrName>style.visibility</p:attrName>
+                                        </p:attrNameLst>
+                                      </p:cBhvr>
+                                      <p:to>
+                                        <p:strVal val="visible"/>
+                                      </p:to>
+                                    </p:set>
+                                  </p:childTnLst>
+                                </p:cTn>
+                              </p:par>
+                            </p:childTnLst>
+                          </p:cTn>
+                        </p:par>
+                      </p:childTnLst>
+                    </p:cTn>
+                  </p:par>
                 </p:childTnLst>
               </p:cTn>
               <p:prevCondLst>
@@ -9105,6 +9304,7 @@
       <p:bldP spid="16" grpId="0"/>
       <p:bldP spid="19" grpId="0"/>
       <p:bldP spid="22" grpId="0"/>
+      <p:bldP spid="25" grpId="0"/>
     </p:bldLst>
   </p:timing>
 </p:sld>
@@ -9134,7 +9334,7 @@
           <p:cNvPr id="15" name="">
             <a:extLst xmlns:a="http://schemas.openxmlformats.org/drawingml/2006/main">
               <a:ext uri="{FF2B5EF4-FFF2-40B4-BE49-F238E27FC236}">
-                <a16:creationId xmlns:a16="http://schemas.microsoft.com/office/drawing/2014/main" id="{761355E7-3A13-4DEF-98B3-B8292D74CDF3}"/>
+                <a16:creationId xmlns:a16="http://schemas.microsoft.com/office/drawing/2014/main" id="{2E58372C-86C6-4626-8BD4-6B2987DF8DEC}"/>
               </a:ext>
             </a:extLst>
           </p:cNvPr>
@@ -9166,7 +9366,7 @@
           <p:cNvPr id="2" name="">
             <a:extLst xmlns:a="http://schemas.openxmlformats.org/drawingml/2006/main">
               <a:ext uri="{FF2B5EF4-FFF2-40B4-BE49-F238E27FC236}">
-                <a16:creationId xmlns:a16="http://schemas.microsoft.com/office/drawing/2014/main" id="{5AEFD5B5-0A68-44AF-B8BF-0576686E25DB}"/>
+                <a16:creationId xmlns:a16="http://schemas.microsoft.com/office/drawing/2014/main" id="{404BF66E-9C32-49AC-B032-B814524C35B2}"/>
               </a:ext>
             </a:extLst>
           </p:cNvPr>
@@ -9223,7 +9423,7 @@
           <p:cNvPr id="3" name="">
             <a:extLst xmlns:a="http://schemas.openxmlformats.org/drawingml/2006/main">
               <a:ext uri="{FF2B5EF4-FFF2-40B4-BE49-F238E27FC236}">
-                <a16:creationId xmlns:a16="http://schemas.microsoft.com/office/drawing/2014/main" id="{03C64E0D-DCAF-4AED-8D4B-4C0E96C5FFEB}"/>
+                <a16:creationId xmlns:a16="http://schemas.microsoft.com/office/drawing/2014/main" id="{DAA3D66C-16E6-48D7-BC95-43650B1ABE36}"/>
               </a:ext>
             </a:extLst>
           </p:cNvPr>
@@ -9255,7 +9455,7 @@
           <p:cNvPr id="4" name="">
             <a:extLst xmlns:a="http://schemas.openxmlformats.org/drawingml/2006/main">
               <a:ext uri="{FF2B5EF4-FFF2-40B4-BE49-F238E27FC236}">
-                <a16:creationId xmlns:a16="http://schemas.microsoft.com/office/drawing/2014/main" id="{E5924070-2524-4A2A-A36A-F1BA07BC56D2}"/>
+                <a16:creationId xmlns:a16="http://schemas.microsoft.com/office/drawing/2014/main" id="{C3BF5C74-7673-4EAF-89B1-4293CE726962}"/>
               </a:ext>
             </a:extLst>
           </p:cNvPr>
@@ -9312,7 +9512,7 @@
           <p:cNvPr id="5" name="">
             <a:extLst xmlns:a="http://schemas.openxmlformats.org/drawingml/2006/main">
               <a:ext uri="{FF2B5EF4-FFF2-40B4-BE49-F238E27FC236}">
-                <a16:creationId xmlns:a16="http://schemas.microsoft.com/office/drawing/2014/main" id="{AA737857-2D55-49E3-8840-F205630342C8}"/>
+                <a16:creationId xmlns:a16="http://schemas.microsoft.com/office/drawing/2014/main" id="{E6D4B2FF-997E-4782-844A-E88DD556688F}"/>
               </a:ext>
             </a:extLst>
           </p:cNvPr>
@@ -9369,7 +9569,7 @@
           <p:cNvPr id="6" name="">
             <a:extLst xmlns:a="http://schemas.openxmlformats.org/drawingml/2006/main">
               <a:ext uri="{FF2B5EF4-FFF2-40B4-BE49-F238E27FC236}">
-                <a16:creationId xmlns:a16="http://schemas.microsoft.com/office/drawing/2014/main" id="{33BF37DD-E4F9-45EA-8E8E-E2BAB18FAF60}"/>
+                <a16:creationId xmlns:a16="http://schemas.microsoft.com/office/drawing/2014/main" id="{C224D839-A4E5-4032-8F6D-E904398903DF}"/>
               </a:ext>
             </a:extLst>
           </p:cNvPr>
@@ -9426,7 +9626,7 @@
           <p:cNvPr id="7" name="">
             <a:extLst xmlns:a="http://schemas.openxmlformats.org/drawingml/2006/main">
               <a:ext uri="{FF2B5EF4-FFF2-40B4-BE49-F238E27FC236}">
-                <a16:creationId xmlns:a16="http://schemas.microsoft.com/office/drawing/2014/main" id="{1BF7248B-F555-4376-9B8E-7A8C4D63FF10}"/>
+                <a16:creationId xmlns:a16="http://schemas.microsoft.com/office/drawing/2014/main" id="{E7AE8E91-9E7A-4E5A-859D-1B5CEBFF7417}"/>
               </a:ext>
             </a:extLst>
           </p:cNvPr>
@@ -9458,7 +9658,7 @@
           <p:cNvPr id="8" name="">
             <a:extLst xmlns:a="http://schemas.openxmlformats.org/drawingml/2006/main">
               <a:ext uri="{FF2B5EF4-FFF2-40B4-BE49-F238E27FC236}">
-                <a16:creationId xmlns:a16="http://schemas.microsoft.com/office/drawing/2014/main" id="{CE400087-132F-44B6-A4C2-28FC33253CF7}"/>
+                <a16:creationId xmlns:a16="http://schemas.microsoft.com/office/drawing/2014/main" id="{CDF95E6A-8EAF-4D8A-B650-723D0FA90EA4}"/>
               </a:ext>
             </a:extLst>
           </p:cNvPr>
@@ -9515,7 +9715,7 @@
           <p:cNvPr id="9" name="">
             <a:extLst xmlns:a="http://schemas.openxmlformats.org/drawingml/2006/main">
               <a:ext uri="{FF2B5EF4-FFF2-40B4-BE49-F238E27FC236}">
-                <a16:creationId xmlns:a16="http://schemas.microsoft.com/office/drawing/2014/main" id="{06231673-FC87-45E2-A51B-0FA5322E4C1D}"/>
+                <a16:creationId xmlns:a16="http://schemas.microsoft.com/office/drawing/2014/main" id="{35FCF104-33C1-490A-9390-CB861D01D44F}"/>
               </a:ext>
             </a:extLst>
           </p:cNvPr>
@@ -9572,7 +9772,7 @@
           <p:cNvPr id="10" name="">
             <a:extLst xmlns:a="http://schemas.openxmlformats.org/drawingml/2006/main">
               <a:ext uri="{FF2B5EF4-FFF2-40B4-BE49-F238E27FC236}">
-                <a16:creationId xmlns:a16="http://schemas.microsoft.com/office/drawing/2014/main" id="{4678B6C4-A793-4CE3-A601-036B492DF75D}"/>
+                <a16:creationId xmlns:a16="http://schemas.microsoft.com/office/drawing/2014/main" id="{821CAD0E-0719-4C92-9839-2CA80CBB3F66}"/>
               </a:ext>
             </a:extLst>
           </p:cNvPr>
@@ -9629,7 +9829,7 @@
           <p:cNvPr id="11" name="">
             <a:extLst xmlns:a="http://schemas.openxmlformats.org/drawingml/2006/main">
               <a:ext uri="{FF2B5EF4-FFF2-40B4-BE49-F238E27FC236}">
-                <a16:creationId xmlns:a16="http://schemas.microsoft.com/office/drawing/2014/main" id="{DA808982-316B-44F4-9B28-544CA886DE9E}"/>
+                <a16:creationId xmlns:a16="http://schemas.microsoft.com/office/drawing/2014/main" id="{05D4E10E-B413-42D6-A734-663AD0387556}"/>
               </a:ext>
             </a:extLst>
           </p:cNvPr>
@@ -9686,7 +9886,7 @@
           <p:cNvPr id="12" name="">
             <a:extLst xmlns:a="http://schemas.openxmlformats.org/drawingml/2006/main">
               <a:ext uri="{FF2B5EF4-FFF2-40B4-BE49-F238E27FC236}">
-                <a16:creationId xmlns:a16="http://schemas.microsoft.com/office/drawing/2014/main" id="{7CF51E17-DF43-4059-A137-9526263A4A7F}"/>
+                <a16:creationId xmlns:a16="http://schemas.microsoft.com/office/drawing/2014/main" id="{EB848EC5-5BCA-4B6C-BCDF-4D2F145C4E29}"/>
               </a:ext>
             </a:extLst>
           </p:cNvPr>
@@ -9718,7 +9918,7 @@
           <p:cNvPr id="13" name="">
             <a:extLst xmlns:a="http://schemas.openxmlformats.org/drawingml/2006/main">
               <a:ext uri="{FF2B5EF4-FFF2-40B4-BE49-F238E27FC236}">
-                <a16:creationId xmlns:a16="http://schemas.microsoft.com/office/drawing/2014/main" id="{47C104D6-8FAF-43A1-9E9F-055705423955}"/>
+                <a16:creationId xmlns:a16="http://schemas.microsoft.com/office/drawing/2014/main" id="{4269E2FD-A587-405F-B24E-E2B898C775F0}"/>
               </a:ext>
             </a:extLst>
           </p:cNvPr>
@@ -9775,7 +9975,7 @@
           <p:cNvPr id="14" name="">
             <a:extLst xmlns:a="http://schemas.openxmlformats.org/drawingml/2006/main">
               <a:ext uri="{FF2B5EF4-FFF2-40B4-BE49-F238E27FC236}">
-                <a16:creationId xmlns:a16="http://schemas.microsoft.com/office/drawing/2014/main" id="{F4CFCCC3-7805-4A96-B03B-0C5F059E15EB}"/>
+                <a16:creationId xmlns:a16="http://schemas.microsoft.com/office/drawing/2014/main" id="{C038F402-F66D-4D84-B8E8-34689A8105FC}"/>
               </a:ext>
             </a:extLst>
           </p:cNvPr>
@@ -9830,7 +10030,7 @@
     </p:spTree>
     <p:extLst>
       <p:ext uri="{BB962C8B-B14F-4D97-AF65-F5344CB8AC3E}">
-        <p14:creationId xmlns:p14="http://schemas.microsoft.com/office/powerpoint/2010/main" val="6154815"/>
+        <p14:creationId xmlns:p14="http://schemas.microsoft.com/office/powerpoint/2010/main" val="1690597636"/>
       </p:ext>
     </p:extLst>
   </p:cSld>
@@ -10031,7 +10231,7 @@
           <p:cNvPr id="16" name="">
             <a:extLst xmlns:a="http://schemas.openxmlformats.org/drawingml/2006/main">
               <a:ext uri="{FF2B5EF4-FFF2-40B4-BE49-F238E27FC236}">
-                <a16:creationId xmlns:a16="http://schemas.microsoft.com/office/drawing/2014/main" id="{8109DC80-E80B-4331-9863-F96C5966D19F}"/>
+                <a16:creationId xmlns:a16="http://schemas.microsoft.com/office/drawing/2014/main" id="{54C39B43-56CA-4B4A-B83A-92ED760CF252}"/>
               </a:ext>
             </a:extLst>
           </p:cNvPr>
@@ -10063,7 +10263,7 @@
           <p:cNvPr id="2" name="">
             <a:extLst xmlns:a="http://schemas.openxmlformats.org/drawingml/2006/main">
               <a:ext uri="{FF2B5EF4-FFF2-40B4-BE49-F238E27FC236}">
-                <a16:creationId xmlns:a16="http://schemas.microsoft.com/office/drawing/2014/main" id="{EAFE7A7C-76F9-4202-A2CB-889F087A3A67}"/>
+                <a16:creationId xmlns:a16="http://schemas.microsoft.com/office/drawing/2014/main" id="{52642503-D1AC-41F4-B5FF-954DACEAC434}"/>
               </a:ext>
             </a:extLst>
           </p:cNvPr>
@@ -10120,7 +10320,7 @@
           <p:cNvPr id="3" name="">
             <a:extLst xmlns:a="http://schemas.openxmlformats.org/drawingml/2006/main">
               <a:ext uri="{FF2B5EF4-FFF2-40B4-BE49-F238E27FC236}">
-                <a16:creationId xmlns:a16="http://schemas.microsoft.com/office/drawing/2014/main" id="{1E43FF1B-79AF-4E6D-82BF-C47B7FCC4798}"/>
+                <a16:creationId xmlns:a16="http://schemas.microsoft.com/office/drawing/2014/main" id="{8DAFFC94-D2A7-48EE-A1A2-2C9D2C1F119A}"/>
               </a:ext>
             </a:extLst>
           </p:cNvPr>
@@ -10152,7 +10352,7 @@
           <p:cNvPr id="4" name="">
             <a:extLst xmlns:a="http://schemas.openxmlformats.org/drawingml/2006/main">
               <a:ext uri="{FF2B5EF4-FFF2-40B4-BE49-F238E27FC236}">
-                <a16:creationId xmlns:a16="http://schemas.microsoft.com/office/drawing/2014/main" id="{6BCA04DF-4B37-4556-A71B-7169F9DF4CF8}"/>
+                <a16:creationId xmlns:a16="http://schemas.microsoft.com/office/drawing/2014/main" id="{581640DC-9DD2-48EE-8FB0-EC943C7CE1BE}"/>
               </a:ext>
             </a:extLst>
           </p:cNvPr>
@@ -10209,7 +10409,7 @@
           <p:cNvPr id="5" name="">
             <a:extLst xmlns:a="http://schemas.openxmlformats.org/drawingml/2006/main">
               <a:ext uri="{FF2B5EF4-FFF2-40B4-BE49-F238E27FC236}">
-                <a16:creationId xmlns:a16="http://schemas.microsoft.com/office/drawing/2014/main" id="{75367C3D-14BA-4488-878B-5AF9BCDC9312}"/>
+                <a16:creationId xmlns:a16="http://schemas.microsoft.com/office/drawing/2014/main" id="{1D079C64-D86B-4A51-98FD-DD3203624D1D}"/>
               </a:ext>
             </a:extLst>
           </p:cNvPr>
@@ -10266,7 +10466,7 @@
           <p:cNvPr id="6" name="">
             <a:extLst xmlns:a="http://schemas.openxmlformats.org/drawingml/2006/main">
               <a:ext uri="{FF2B5EF4-FFF2-40B4-BE49-F238E27FC236}">
-                <a16:creationId xmlns:a16="http://schemas.microsoft.com/office/drawing/2014/main" id="{971C49A1-A1C3-47E5-9D13-E9A6742CCC99}"/>
+                <a16:creationId xmlns:a16="http://schemas.microsoft.com/office/drawing/2014/main" id="{0B4FC093-5806-4BD9-99D1-E8E7257A4984}"/>
               </a:ext>
             </a:extLst>
           </p:cNvPr>
@@ -10323,7 +10523,7 @@
           <p:cNvPr id="7" name="">
             <a:extLst xmlns:a="http://schemas.openxmlformats.org/drawingml/2006/main">
               <a:ext uri="{FF2B5EF4-FFF2-40B4-BE49-F238E27FC236}">
-                <a16:creationId xmlns:a16="http://schemas.microsoft.com/office/drawing/2014/main" id="{ED28DB3C-992E-467D-921F-3158DC09CC33}"/>
+                <a16:creationId xmlns:a16="http://schemas.microsoft.com/office/drawing/2014/main" id="{F9E18648-9580-4C4C-A0A3-F3BC00D568B7}"/>
               </a:ext>
             </a:extLst>
           </p:cNvPr>
@@ -10355,7 +10555,7 @@
           <p:cNvPr id="8" name="">
             <a:extLst xmlns:a="http://schemas.openxmlformats.org/drawingml/2006/main">
               <a:ext uri="{FF2B5EF4-FFF2-40B4-BE49-F238E27FC236}">
-                <a16:creationId xmlns:a16="http://schemas.microsoft.com/office/drawing/2014/main" id="{E228E89E-4726-4EF6-9545-2B9DE0B2FAD8}"/>
+                <a16:creationId xmlns:a16="http://schemas.microsoft.com/office/drawing/2014/main" id="{F1A25FB3-6C65-488A-A92E-DD1A3EEE2577}"/>
               </a:ext>
             </a:extLst>
           </p:cNvPr>
@@ -10412,7 +10612,7 @@
           <p:cNvPr id="9" name="">
             <a:extLst xmlns:a="http://schemas.openxmlformats.org/drawingml/2006/main">
               <a:ext uri="{FF2B5EF4-FFF2-40B4-BE49-F238E27FC236}">
-                <a16:creationId xmlns:a16="http://schemas.microsoft.com/office/drawing/2014/main" id="{23C3CA90-E9C9-478F-8284-95384B07EC76}"/>
+                <a16:creationId xmlns:a16="http://schemas.microsoft.com/office/drawing/2014/main" id="{700B9EF8-2F5D-4074-9A84-F2C7B0117D6F}"/>
               </a:ext>
             </a:extLst>
           </p:cNvPr>
@@ -10469,7 +10669,7 @@
           <p:cNvPr id="10" name="">
             <a:extLst xmlns:a="http://schemas.openxmlformats.org/drawingml/2006/main">
               <a:ext uri="{FF2B5EF4-FFF2-40B4-BE49-F238E27FC236}">
-                <a16:creationId xmlns:a16="http://schemas.microsoft.com/office/drawing/2014/main" id="{1F0282DC-BC35-4BB0-8825-79C9272EA7A4}"/>
+                <a16:creationId xmlns:a16="http://schemas.microsoft.com/office/drawing/2014/main" id="{32AACC63-0787-465A-871A-7800DD58B8FD}"/>
               </a:ext>
             </a:extLst>
           </p:cNvPr>
@@ -10526,7 +10726,7 @@
           <p:cNvPr id="11" name="">
             <a:extLst xmlns:a="http://schemas.openxmlformats.org/drawingml/2006/main">
               <a:ext uri="{FF2B5EF4-FFF2-40B4-BE49-F238E27FC236}">
-                <a16:creationId xmlns:a16="http://schemas.microsoft.com/office/drawing/2014/main" id="{E8F17B0B-A8AB-4A6A-8F7D-ED7227D9A126}"/>
+                <a16:creationId xmlns:a16="http://schemas.microsoft.com/office/drawing/2014/main" id="{D40F5A40-5727-4F1D-9E47-628A07184781}"/>
               </a:ext>
             </a:extLst>
           </p:cNvPr>
@@ -10583,7 +10783,7 @@
           <p:cNvPr id="12" name="">
             <a:extLst xmlns:a="http://schemas.openxmlformats.org/drawingml/2006/main">
               <a:ext uri="{FF2B5EF4-FFF2-40B4-BE49-F238E27FC236}">
-                <a16:creationId xmlns:a16="http://schemas.microsoft.com/office/drawing/2014/main" id="{DD25EB8C-6DB9-45C7-9AB8-530EE06738D8}"/>
+                <a16:creationId xmlns:a16="http://schemas.microsoft.com/office/drawing/2014/main" id="{18457518-6746-40C7-8BD6-124E8E5C646B}"/>
               </a:ext>
             </a:extLst>
           </p:cNvPr>
@@ -10640,7 +10840,7 @@
           <p:cNvPr id="13" name="">
             <a:extLst xmlns:a="http://schemas.openxmlformats.org/drawingml/2006/main">
               <a:ext uri="{FF2B5EF4-FFF2-40B4-BE49-F238E27FC236}">
-                <a16:creationId xmlns:a16="http://schemas.microsoft.com/office/drawing/2014/main" id="{64D7E06F-5E70-45E3-B961-5E686C81E155}"/>
+                <a16:creationId xmlns:a16="http://schemas.microsoft.com/office/drawing/2014/main" id="{1EF45193-5186-4B42-A5D1-45640C804C83}"/>
               </a:ext>
             </a:extLst>
           </p:cNvPr>
@@ -10697,7 +10897,7 @@
           <p:cNvPr id="14" name="">
             <a:extLst xmlns:a="http://schemas.openxmlformats.org/drawingml/2006/main">
               <a:ext uri="{FF2B5EF4-FFF2-40B4-BE49-F238E27FC236}">
-                <a16:creationId xmlns:a16="http://schemas.microsoft.com/office/drawing/2014/main" id="{BAB16FD9-9B75-4993-862B-A579A1B8C280}"/>
+                <a16:creationId xmlns:a16="http://schemas.microsoft.com/office/drawing/2014/main" id="{095FB857-BAA2-4533-B47C-640105E59604}"/>
               </a:ext>
             </a:extLst>
           </p:cNvPr>
@@ -10754,7 +10954,7 @@
           <p:cNvPr id="15" name="">
             <a:extLst xmlns:a="http://schemas.openxmlformats.org/drawingml/2006/main">
               <a:ext uri="{FF2B5EF4-FFF2-40B4-BE49-F238E27FC236}">
-                <a16:creationId xmlns:a16="http://schemas.microsoft.com/office/drawing/2014/main" id="{7256E6DA-234E-49B2-B2B8-92469F9017B5}"/>
+                <a16:creationId xmlns:a16="http://schemas.microsoft.com/office/drawing/2014/main" id="{6F4C97FB-1DE3-4B5F-8676-6EECDA873425}"/>
               </a:ext>
             </a:extLst>
           </p:cNvPr>
@@ -10809,7 +11009,7 @@
     </p:spTree>
     <p:extLst>
       <p:ext uri="{BB962C8B-B14F-4D97-AF65-F5344CB8AC3E}">
-        <p14:creationId xmlns:p14="http://schemas.microsoft.com/office/powerpoint/2010/main" val="1041484353"/>
+        <p14:creationId xmlns:p14="http://schemas.microsoft.com/office/powerpoint/2010/main" val="1703394772"/>
       </p:ext>
     </p:extLst>
   </p:cSld>
@@ -10964,7 +11164,7 @@
           <p:cNvPr id="16" name="">
             <a:extLst xmlns:a="http://schemas.openxmlformats.org/drawingml/2006/main">
               <a:ext uri="{FF2B5EF4-FFF2-40B4-BE49-F238E27FC236}">
-                <a16:creationId xmlns:a16="http://schemas.microsoft.com/office/drawing/2014/main" id="{48C0D689-191D-4E42-87F1-F4604B3A7A67}"/>
+                <a16:creationId xmlns:a16="http://schemas.microsoft.com/office/drawing/2014/main" id="{C534F369-A4BF-4ED6-B20D-164AF44E9687}"/>
               </a:ext>
             </a:extLst>
           </p:cNvPr>
@@ -10996,7 +11196,7 @@
           <p:cNvPr id="2" name="">
             <a:extLst xmlns:a="http://schemas.openxmlformats.org/drawingml/2006/main">
               <a:ext uri="{FF2B5EF4-FFF2-40B4-BE49-F238E27FC236}">
-                <a16:creationId xmlns:a16="http://schemas.microsoft.com/office/drawing/2014/main" id="{88B32532-2527-4716-B067-93F63E796A13}"/>
+                <a16:creationId xmlns:a16="http://schemas.microsoft.com/office/drawing/2014/main" id="{F8765EF2-830A-4008-A0C1-5AE74E210A38}"/>
               </a:ext>
             </a:extLst>
           </p:cNvPr>
@@ -11053,7 +11253,7 @@
           <p:cNvPr id="3" name="">
             <a:extLst xmlns:a="http://schemas.openxmlformats.org/drawingml/2006/main">
               <a:ext uri="{FF2B5EF4-FFF2-40B4-BE49-F238E27FC236}">
-                <a16:creationId xmlns:a16="http://schemas.microsoft.com/office/drawing/2014/main" id="{17D034F0-3D94-4CBC-8B3A-F19A0CC32F9D}"/>
+                <a16:creationId xmlns:a16="http://schemas.microsoft.com/office/drawing/2014/main" id="{6338A61E-98D3-4408-8BF4-02115EFDD2D6}"/>
               </a:ext>
             </a:extLst>
           </p:cNvPr>
@@ -11085,7 +11285,7 @@
           <p:cNvPr id="4" name="">
             <a:extLst xmlns:a="http://schemas.openxmlformats.org/drawingml/2006/main">
               <a:ext uri="{FF2B5EF4-FFF2-40B4-BE49-F238E27FC236}">
-                <a16:creationId xmlns:a16="http://schemas.microsoft.com/office/drawing/2014/main" id="{4BEDF4D0-210C-436C-B428-D69D3FF5723D}"/>
+                <a16:creationId xmlns:a16="http://schemas.microsoft.com/office/drawing/2014/main" id="{0207432F-CB38-491C-A29F-FBDAA9EC78E3}"/>
               </a:ext>
             </a:extLst>
           </p:cNvPr>
@@ -11142,7 +11342,7 @@
           <p:cNvPr id="5" name="">
             <a:extLst xmlns:a="http://schemas.openxmlformats.org/drawingml/2006/main">
               <a:ext uri="{FF2B5EF4-FFF2-40B4-BE49-F238E27FC236}">
-                <a16:creationId xmlns:a16="http://schemas.microsoft.com/office/drawing/2014/main" id="{26D84A7E-371D-4452-921E-722DAB9A6D4E}"/>
+                <a16:creationId xmlns:a16="http://schemas.microsoft.com/office/drawing/2014/main" id="{3023A55E-85C5-463D-A0E5-55E292820DB4}"/>
               </a:ext>
             </a:extLst>
           </p:cNvPr>
@@ -11199,7 +11399,7 @@
           <p:cNvPr id="6" name="">
             <a:extLst xmlns:a="http://schemas.openxmlformats.org/drawingml/2006/main">
               <a:ext uri="{FF2B5EF4-FFF2-40B4-BE49-F238E27FC236}">
-                <a16:creationId xmlns:a16="http://schemas.microsoft.com/office/drawing/2014/main" id="{1AA0E30D-5564-47BC-B91F-2780A8ED75F1}"/>
+                <a16:creationId xmlns:a16="http://schemas.microsoft.com/office/drawing/2014/main" id="{E67A563F-F404-4667-9EEA-503CDC704471}"/>
               </a:ext>
             </a:extLst>
           </p:cNvPr>
@@ -11256,7 +11456,7 @@
           <p:cNvPr id="7" name="">
             <a:extLst xmlns:a="http://schemas.openxmlformats.org/drawingml/2006/main">
               <a:ext uri="{FF2B5EF4-FFF2-40B4-BE49-F238E27FC236}">
-                <a16:creationId xmlns:a16="http://schemas.microsoft.com/office/drawing/2014/main" id="{FC51195C-C3CB-49CA-936C-6750DBE204E8}"/>
+                <a16:creationId xmlns:a16="http://schemas.microsoft.com/office/drawing/2014/main" id="{20CB338D-5FE2-417E-9502-9032F03B2BD0}"/>
               </a:ext>
             </a:extLst>
           </p:cNvPr>
@@ -11288,7 +11488,7 @@
           <p:cNvPr id="8" name="">
             <a:extLst xmlns:a="http://schemas.openxmlformats.org/drawingml/2006/main">
               <a:ext uri="{FF2B5EF4-FFF2-40B4-BE49-F238E27FC236}">
-                <a16:creationId xmlns:a16="http://schemas.microsoft.com/office/drawing/2014/main" id="{7A7F4B19-1F73-49B2-98FD-C9BE22BD45FC}"/>
+                <a16:creationId xmlns:a16="http://schemas.microsoft.com/office/drawing/2014/main" id="{5E1FB88B-29C6-4258-876C-ADAE3D980AFA}"/>
               </a:ext>
             </a:extLst>
           </p:cNvPr>
@@ -11345,7 +11545,7 @@
           <p:cNvPr id="9" name="">
             <a:extLst xmlns:a="http://schemas.openxmlformats.org/drawingml/2006/main">
               <a:ext uri="{FF2B5EF4-FFF2-40B4-BE49-F238E27FC236}">
-                <a16:creationId xmlns:a16="http://schemas.microsoft.com/office/drawing/2014/main" id="{E9E3D36C-01DB-4C60-9051-FD43E14B3243}"/>
+                <a16:creationId xmlns:a16="http://schemas.microsoft.com/office/drawing/2014/main" id="{15F7C959-2A96-400D-99C7-02336E15BC74}"/>
               </a:ext>
             </a:extLst>
           </p:cNvPr>
@@ -11406,7 +11606,7 @@
           <p:nvPr/>
         </p:nvPicPr>
         <p:blipFill>
-          <a:blip xmlns:r="http://schemas.openxmlformats.org/officeDocument/2006/relationships" xmlns:a="http://schemas.openxmlformats.org/drawingml/2006/main" r:embed="R41489d1765e54292"/>
+          <a:blip xmlns:r="http://schemas.openxmlformats.org/officeDocument/2006/relationships" xmlns:a="http://schemas.openxmlformats.org/drawingml/2006/main" r:embed="R6274089c6065432f"/>
           <a:stretch xmlns:a="http://schemas.openxmlformats.org/drawingml/2006/main"/>
         </p:blipFill>
         <p:spPr>
@@ -11424,7 +11624,7 @@
           <p:cNvPr id="11" name="">
             <a:extLst xmlns:a="http://schemas.openxmlformats.org/drawingml/2006/main">
               <a:ext uri="{FF2B5EF4-FFF2-40B4-BE49-F238E27FC236}">
-                <a16:creationId xmlns:a16="http://schemas.microsoft.com/office/drawing/2014/main" id="{24FBF81B-333F-49FB-8255-4D28203C12A8}"/>
+                <a16:creationId xmlns:a16="http://schemas.microsoft.com/office/drawing/2014/main" id="{2DD9CAD2-1306-4CFE-9FAA-68CD63FA1407}"/>
               </a:ext>
             </a:extLst>
           </p:cNvPr>
@@ -11481,7 +11681,7 @@
           <p:cNvPr id="12" name="">
             <a:extLst xmlns:a="http://schemas.openxmlformats.org/drawingml/2006/main">
               <a:ext uri="{FF2B5EF4-FFF2-40B4-BE49-F238E27FC236}">
-                <a16:creationId xmlns:a16="http://schemas.microsoft.com/office/drawing/2014/main" id="{15FE7CAA-261D-48E7-8B8F-C9856D634FF2}"/>
+                <a16:creationId xmlns:a16="http://schemas.microsoft.com/office/drawing/2014/main" id="{85D4B82E-4CA1-4FA8-9817-F432C13676CA}"/>
               </a:ext>
             </a:extLst>
           </p:cNvPr>
@@ -11538,7 +11738,7 @@
           <p:cNvPr id="13" name="">
             <a:extLst xmlns:a="http://schemas.openxmlformats.org/drawingml/2006/main">
               <a:ext uri="{FF2B5EF4-FFF2-40B4-BE49-F238E27FC236}">
-                <a16:creationId xmlns:a16="http://schemas.microsoft.com/office/drawing/2014/main" id="{53EDB3F3-508D-4E39-8DC9-54AAC642DF68}"/>
+                <a16:creationId xmlns:a16="http://schemas.microsoft.com/office/drawing/2014/main" id="{DBB9560E-0196-4315-9F30-F96890AE5DD4}"/>
               </a:ext>
             </a:extLst>
           </p:cNvPr>
@@ -11570,7 +11770,7 @@
           <p:cNvPr id="14" name="">
             <a:extLst xmlns:a="http://schemas.openxmlformats.org/drawingml/2006/main">
               <a:ext uri="{FF2B5EF4-FFF2-40B4-BE49-F238E27FC236}">
-                <a16:creationId xmlns:a16="http://schemas.microsoft.com/office/drawing/2014/main" id="{8BABB990-8D3E-46FD-BEC9-F00EA0607F1B}"/>
+                <a16:creationId xmlns:a16="http://schemas.microsoft.com/office/drawing/2014/main" id="{1FF3D162-AAF5-4E3A-AB31-1A67533780B1}"/>
               </a:ext>
             </a:extLst>
           </p:cNvPr>
@@ -11627,7 +11827,7 @@
           <p:cNvPr id="15" name="">
             <a:extLst xmlns:a="http://schemas.openxmlformats.org/drawingml/2006/main">
               <a:ext uri="{FF2B5EF4-FFF2-40B4-BE49-F238E27FC236}">
-                <a16:creationId xmlns:a16="http://schemas.microsoft.com/office/drawing/2014/main" id="{9D77A2B6-6584-47DD-BB1E-33BFD0933DAE}"/>
+                <a16:creationId xmlns:a16="http://schemas.microsoft.com/office/drawing/2014/main" id="{C6EF5EF3-A24D-465D-B995-8D0E1FC37D4B}"/>
               </a:ext>
             </a:extLst>
           </p:cNvPr>
@@ -11682,7 +11882,7 @@
     </p:spTree>
     <p:extLst>
       <p:ext uri="{BB962C8B-B14F-4D97-AF65-F5344CB8AC3E}">
-        <p14:creationId xmlns:p14="http://schemas.microsoft.com/office/powerpoint/2010/main" val="1093484542"/>
+        <p14:creationId xmlns:p14="http://schemas.microsoft.com/office/powerpoint/2010/main" val="1819357145"/>
       </p:ext>
     </p:extLst>
   </p:cSld>
@@ -11837,7 +12037,7 @@
           <p:cNvPr id="23" name="">
             <a:extLst xmlns:a="http://schemas.openxmlformats.org/drawingml/2006/main">
               <a:ext uri="{FF2B5EF4-FFF2-40B4-BE49-F238E27FC236}">
-                <a16:creationId xmlns:a16="http://schemas.microsoft.com/office/drawing/2014/main" id="{36160DB8-50F9-43A1-B21F-7FEE88A97753}"/>
+                <a16:creationId xmlns:a16="http://schemas.microsoft.com/office/drawing/2014/main" id="{6CBBC254-2CA2-483A-84AF-F5535CE0B2DD}"/>
               </a:ext>
             </a:extLst>
           </p:cNvPr>
@@ -11869,7 +12069,7 @@
           <p:cNvPr id="2" name="">
             <a:extLst xmlns:a="http://schemas.openxmlformats.org/drawingml/2006/main">
               <a:ext uri="{FF2B5EF4-FFF2-40B4-BE49-F238E27FC236}">
-                <a16:creationId xmlns:a16="http://schemas.microsoft.com/office/drawing/2014/main" id="{26A9A555-9FFA-4737-BFF2-6A3FD640F13A}"/>
+                <a16:creationId xmlns:a16="http://schemas.microsoft.com/office/drawing/2014/main" id="{882E56D5-E00D-4F67-B03E-E186B5D1171F}"/>
               </a:ext>
             </a:extLst>
           </p:cNvPr>
@@ -11926,7 +12126,7 @@
           <p:cNvPr id="3" name="">
             <a:extLst xmlns:a="http://schemas.openxmlformats.org/drawingml/2006/main">
               <a:ext uri="{FF2B5EF4-FFF2-40B4-BE49-F238E27FC236}">
-                <a16:creationId xmlns:a16="http://schemas.microsoft.com/office/drawing/2014/main" id="{F8E0780B-661C-40E5-A8FC-82B6AC9B3D4C}"/>
+                <a16:creationId xmlns:a16="http://schemas.microsoft.com/office/drawing/2014/main" id="{A28F82C9-BF54-4EA6-A474-1EF16A75AB80}"/>
               </a:ext>
             </a:extLst>
           </p:cNvPr>
@@ -11958,7 +12158,7 @@
           <p:cNvPr id="4" name="">
             <a:extLst xmlns:a="http://schemas.openxmlformats.org/drawingml/2006/main">
               <a:ext uri="{FF2B5EF4-FFF2-40B4-BE49-F238E27FC236}">
-                <a16:creationId xmlns:a16="http://schemas.microsoft.com/office/drawing/2014/main" id="{9B3EC764-2844-4B3E-BFD8-A2CE6FB9D71E}"/>
+                <a16:creationId xmlns:a16="http://schemas.microsoft.com/office/drawing/2014/main" id="{0C75B9C8-5379-4D4B-9A28-AC67AA645049}"/>
               </a:ext>
             </a:extLst>
           </p:cNvPr>
@@ -12015,7 +12215,7 @@
           <p:cNvPr id="5" name="">
             <a:extLst xmlns:a="http://schemas.openxmlformats.org/drawingml/2006/main">
               <a:ext uri="{FF2B5EF4-FFF2-40B4-BE49-F238E27FC236}">
-                <a16:creationId xmlns:a16="http://schemas.microsoft.com/office/drawing/2014/main" id="{CE3D414E-5199-4F0B-912B-1E4AAC2636D7}"/>
+                <a16:creationId xmlns:a16="http://schemas.microsoft.com/office/drawing/2014/main" id="{AC1B25DD-B90D-4A2C-ACF5-3EEBABC4CE56}"/>
               </a:ext>
             </a:extLst>
           </p:cNvPr>
@@ -12072,7 +12272,7 @@
           <p:cNvPr id="6" name="">
             <a:extLst xmlns:a="http://schemas.openxmlformats.org/drawingml/2006/main">
               <a:ext uri="{FF2B5EF4-FFF2-40B4-BE49-F238E27FC236}">
-                <a16:creationId xmlns:a16="http://schemas.microsoft.com/office/drawing/2014/main" id="{5DEB0F4C-A960-49AD-824B-BC194659F5B6}"/>
+                <a16:creationId xmlns:a16="http://schemas.microsoft.com/office/drawing/2014/main" id="{79E9AB25-4008-4471-8A55-983BC5761C38}"/>
               </a:ext>
             </a:extLst>
           </p:cNvPr>
@@ -12129,7 +12329,7 @@
           <p:cNvPr id="7" name="">
             <a:extLst xmlns:a="http://schemas.openxmlformats.org/drawingml/2006/main">
               <a:ext uri="{FF2B5EF4-FFF2-40B4-BE49-F238E27FC236}">
-                <a16:creationId xmlns:a16="http://schemas.microsoft.com/office/drawing/2014/main" id="{89DB4E94-38BA-40DA-9E9B-2E81F30474F4}"/>
+                <a16:creationId xmlns:a16="http://schemas.microsoft.com/office/drawing/2014/main" id="{BC76F362-0751-4F5B-8ED5-FDF69A56C749}"/>
               </a:ext>
             </a:extLst>
           </p:cNvPr>
@@ -12161,7 +12361,7 @@
           <p:cNvPr id="8" name="">
             <a:extLst xmlns:a="http://schemas.openxmlformats.org/drawingml/2006/main">
               <a:ext uri="{FF2B5EF4-FFF2-40B4-BE49-F238E27FC236}">
-                <a16:creationId xmlns:a16="http://schemas.microsoft.com/office/drawing/2014/main" id="{01C9DB53-AC46-459C-8A9B-95C3E6E3CB07}"/>
+                <a16:creationId xmlns:a16="http://schemas.microsoft.com/office/drawing/2014/main" id="{51041ED4-5DFE-46B0-BC08-6A884FCC9DAE}"/>
               </a:ext>
             </a:extLst>
           </p:cNvPr>
@@ -12218,7 +12418,7 @@
           <p:cNvPr id="9" name="">
             <a:extLst xmlns:a="http://schemas.openxmlformats.org/drawingml/2006/main">
               <a:ext uri="{FF2B5EF4-FFF2-40B4-BE49-F238E27FC236}">
-                <a16:creationId xmlns:a16="http://schemas.microsoft.com/office/drawing/2014/main" id="{E496FD88-CF76-44B7-AFF9-6DD856C46893}"/>
+                <a16:creationId xmlns:a16="http://schemas.microsoft.com/office/drawing/2014/main" id="{0160C899-F426-4A52-A623-4D83EC6E23D4}"/>
               </a:ext>
             </a:extLst>
           </p:cNvPr>
@@ -12275,7 +12475,7 @@
           <p:cNvPr id="10" name="">
             <a:extLst xmlns:a="http://schemas.openxmlformats.org/drawingml/2006/main">
               <a:ext uri="{FF2B5EF4-FFF2-40B4-BE49-F238E27FC236}">
-                <a16:creationId xmlns:a16="http://schemas.microsoft.com/office/drawing/2014/main" id="{5258E431-CE8C-4455-8FFC-D03CDD5EB967}"/>
+                <a16:creationId xmlns:a16="http://schemas.microsoft.com/office/drawing/2014/main" id="{2EC3AAFF-9DEF-4989-AA11-F84796CEBC2C}"/>
               </a:ext>
             </a:extLst>
           </p:cNvPr>
@@ -12309,7 +12509,7 @@
           <p:cNvPr id="11" name="">
             <a:extLst xmlns:a="http://schemas.openxmlformats.org/drawingml/2006/main">
               <a:ext uri="{FF2B5EF4-FFF2-40B4-BE49-F238E27FC236}">
-                <a16:creationId xmlns:a16="http://schemas.microsoft.com/office/drawing/2014/main" id="{7E307D33-5A75-4910-98F9-9BB7B587DEB1}"/>
+                <a16:creationId xmlns:a16="http://schemas.microsoft.com/office/drawing/2014/main" id="{C3F62854-5056-4C42-821F-6333B93FC516}"/>
               </a:ext>
             </a:extLst>
           </p:cNvPr>
@@ -12341,7 +12541,7 @@
           <p:cNvPr id="12" name="">
             <a:extLst xmlns:a="http://schemas.openxmlformats.org/drawingml/2006/main">
               <a:ext uri="{FF2B5EF4-FFF2-40B4-BE49-F238E27FC236}">
-                <a16:creationId xmlns:a16="http://schemas.microsoft.com/office/drawing/2014/main" id="{53199D74-63EF-44DD-9200-9829D4D255CF}"/>
+                <a16:creationId xmlns:a16="http://schemas.microsoft.com/office/drawing/2014/main" id="{F6A7459E-AA9E-48D8-9370-B6610A734FEC}"/>
               </a:ext>
             </a:extLst>
           </p:cNvPr>
@@ -12398,7 +12598,7 @@
           <p:cNvPr id="13" name="">
             <a:extLst xmlns:a="http://schemas.openxmlformats.org/drawingml/2006/main">
               <a:ext uri="{FF2B5EF4-FFF2-40B4-BE49-F238E27FC236}">
-                <a16:creationId xmlns:a16="http://schemas.microsoft.com/office/drawing/2014/main" id="{4DF97990-BE6C-4260-A132-B5C979BFF78C}"/>
+                <a16:creationId xmlns:a16="http://schemas.microsoft.com/office/drawing/2014/main" id="{7915BFBE-DC21-4A4F-839E-0AAC2C5EBB61}"/>
               </a:ext>
             </a:extLst>
           </p:cNvPr>
@@ -12455,7 +12655,7 @@
           <p:cNvPr id="14" name="">
             <a:extLst xmlns:a="http://schemas.openxmlformats.org/drawingml/2006/main">
               <a:ext uri="{FF2B5EF4-FFF2-40B4-BE49-F238E27FC236}">
-                <a16:creationId xmlns:a16="http://schemas.microsoft.com/office/drawing/2014/main" id="{A224571E-FD8D-491F-84AE-C5B1589C9576}"/>
+                <a16:creationId xmlns:a16="http://schemas.microsoft.com/office/drawing/2014/main" id="{3D5A05A5-530A-4CE3-851F-B6EB27070B0A}"/>
               </a:ext>
             </a:extLst>
           </p:cNvPr>
@@ -12489,7 +12689,7 @@
           <p:cNvPr id="15" name="">
             <a:extLst xmlns:a="http://schemas.openxmlformats.org/drawingml/2006/main">
               <a:ext uri="{FF2B5EF4-FFF2-40B4-BE49-F238E27FC236}">
-                <a16:creationId xmlns:a16="http://schemas.microsoft.com/office/drawing/2014/main" id="{7A6FB710-B7C9-4054-92D1-2A80F111B874}"/>
+                <a16:creationId xmlns:a16="http://schemas.microsoft.com/office/drawing/2014/main" id="{DBBB08BD-D137-4A0B-AD31-E89BAEDA8A8A}"/>
               </a:ext>
             </a:extLst>
           </p:cNvPr>
@@ -12521,7 +12721,7 @@
           <p:cNvPr id="16" name="">
             <a:extLst xmlns:a="http://schemas.openxmlformats.org/drawingml/2006/main">
               <a:ext uri="{FF2B5EF4-FFF2-40B4-BE49-F238E27FC236}">
-                <a16:creationId xmlns:a16="http://schemas.microsoft.com/office/drawing/2014/main" id="{4C3C8FEC-37CC-490A-8B3D-FF5208C8DF0F}"/>
+                <a16:creationId xmlns:a16="http://schemas.microsoft.com/office/drawing/2014/main" id="{0417D2CC-82FD-4E78-928A-58312A78CFE8}"/>
               </a:ext>
             </a:extLst>
           </p:cNvPr>
@@ -12578,7 +12778,7 @@
           <p:cNvPr id="17" name="">
             <a:extLst xmlns:a="http://schemas.openxmlformats.org/drawingml/2006/main">
               <a:ext uri="{FF2B5EF4-FFF2-40B4-BE49-F238E27FC236}">
-                <a16:creationId xmlns:a16="http://schemas.microsoft.com/office/drawing/2014/main" id="{A521BD5B-2EEE-4A89-B2F7-594D19B6121A}"/>
+                <a16:creationId xmlns:a16="http://schemas.microsoft.com/office/drawing/2014/main" id="{79699E76-92C1-4E44-A551-04CC26179BF8}"/>
               </a:ext>
             </a:extLst>
           </p:cNvPr>
@@ -12635,7 +12835,7 @@
           <p:cNvPr id="18" name="">
             <a:extLst xmlns:a="http://schemas.openxmlformats.org/drawingml/2006/main">
               <a:ext uri="{FF2B5EF4-FFF2-40B4-BE49-F238E27FC236}">
-                <a16:creationId xmlns:a16="http://schemas.microsoft.com/office/drawing/2014/main" id="{1EF0A72C-E612-485C-8046-A8F75239346E}"/>
+                <a16:creationId xmlns:a16="http://schemas.microsoft.com/office/drawing/2014/main" id="{B49384B1-387F-4945-9DBE-F2CAE86F6688}"/>
               </a:ext>
             </a:extLst>
           </p:cNvPr>
@@ -12669,7 +12869,7 @@
           <p:cNvPr id="19" name="">
             <a:extLst xmlns:a="http://schemas.openxmlformats.org/drawingml/2006/main">
               <a:ext uri="{FF2B5EF4-FFF2-40B4-BE49-F238E27FC236}">
-                <a16:creationId xmlns:a16="http://schemas.microsoft.com/office/drawing/2014/main" id="{C38CBA4F-68D0-48AC-B06C-1F2DAB7D5817}"/>
+                <a16:creationId xmlns:a16="http://schemas.microsoft.com/office/drawing/2014/main" id="{C55BF755-4EA1-483F-87DA-773CFA8FFCD2}"/>
               </a:ext>
             </a:extLst>
           </p:cNvPr>
@@ -12701,7 +12901,7 @@
           <p:cNvPr id="20" name="">
             <a:extLst xmlns:a="http://schemas.openxmlformats.org/drawingml/2006/main">
               <a:ext uri="{FF2B5EF4-FFF2-40B4-BE49-F238E27FC236}">
-                <a16:creationId xmlns:a16="http://schemas.microsoft.com/office/drawing/2014/main" id="{03B464E8-0799-4139-BFF1-A161C9BACB1A}"/>
+                <a16:creationId xmlns:a16="http://schemas.microsoft.com/office/drawing/2014/main" id="{18953F3E-0A17-4BAF-BD52-D403678A0D1A}"/>
               </a:ext>
             </a:extLst>
           </p:cNvPr>
@@ -12758,7 +12958,7 @@
           <p:cNvPr id="21" name="">
             <a:extLst xmlns:a="http://schemas.openxmlformats.org/drawingml/2006/main">
               <a:ext uri="{FF2B5EF4-FFF2-40B4-BE49-F238E27FC236}">
-                <a16:creationId xmlns:a16="http://schemas.microsoft.com/office/drawing/2014/main" id="{4DE5ED15-9240-4CE3-AE3B-A1127300CEBA}"/>
+                <a16:creationId xmlns:a16="http://schemas.microsoft.com/office/drawing/2014/main" id="{1DE8FA3C-1068-4159-9EF7-8F5ED181EA15}"/>
               </a:ext>
             </a:extLst>
           </p:cNvPr>
@@ -12815,7 +13015,7 @@
           <p:cNvPr id="22" name="">
             <a:extLst xmlns:a="http://schemas.openxmlformats.org/drawingml/2006/main">
               <a:ext uri="{FF2B5EF4-FFF2-40B4-BE49-F238E27FC236}">
-                <a16:creationId xmlns:a16="http://schemas.microsoft.com/office/drawing/2014/main" id="{4DBE209B-37FD-42BD-B229-2C6929E1B4EF}"/>
+                <a16:creationId xmlns:a16="http://schemas.microsoft.com/office/drawing/2014/main" id="{BBE142B7-CDFF-4B05-B99E-828C53023317}"/>
               </a:ext>
             </a:extLst>
           </p:cNvPr>
@@ -12870,7 +13070,7 @@
     </p:spTree>
     <p:extLst>
       <p:ext uri="{BB962C8B-B14F-4D97-AF65-F5344CB8AC3E}">
-        <p14:creationId xmlns:p14="http://schemas.microsoft.com/office/powerpoint/2010/main" val="1274383464"/>
+        <p14:creationId xmlns:p14="http://schemas.microsoft.com/office/powerpoint/2010/main" val="1651977430"/>
       </p:ext>
     </p:extLst>
   </p:cSld>
@@ -13071,7 +13271,7 @@
           <p:cNvPr id="22" name="">
             <a:extLst xmlns:a="http://schemas.openxmlformats.org/drawingml/2006/main">
               <a:ext uri="{FF2B5EF4-FFF2-40B4-BE49-F238E27FC236}">
-                <a16:creationId xmlns:a16="http://schemas.microsoft.com/office/drawing/2014/main" id="{02B987B5-7399-4C50-99BC-207FA4C5A421}"/>
+                <a16:creationId xmlns:a16="http://schemas.microsoft.com/office/drawing/2014/main" id="{D09B6253-6D4F-4401-9387-228395043726}"/>
               </a:ext>
             </a:extLst>
           </p:cNvPr>
@@ -13103,7 +13303,7 @@
           <p:cNvPr id="2" name="">
             <a:extLst xmlns:a="http://schemas.openxmlformats.org/drawingml/2006/main">
               <a:ext uri="{FF2B5EF4-FFF2-40B4-BE49-F238E27FC236}">
-                <a16:creationId xmlns:a16="http://schemas.microsoft.com/office/drawing/2014/main" id="{479B25B5-639B-4F6D-8EE7-90E67673026E}"/>
+                <a16:creationId xmlns:a16="http://schemas.microsoft.com/office/drawing/2014/main" id="{ADFE275F-3B0C-48F0-B889-6656B98AB912}"/>
               </a:ext>
             </a:extLst>
           </p:cNvPr>
@@ -13160,7 +13360,7 @@
           <p:cNvPr id="3" name="">
             <a:extLst xmlns:a="http://schemas.openxmlformats.org/drawingml/2006/main">
               <a:ext uri="{FF2B5EF4-FFF2-40B4-BE49-F238E27FC236}">
-                <a16:creationId xmlns:a16="http://schemas.microsoft.com/office/drawing/2014/main" id="{23390E28-BED0-45FF-9A61-95BD3D4A7556}"/>
+                <a16:creationId xmlns:a16="http://schemas.microsoft.com/office/drawing/2014/main" id="{C380D10D-6781-4A83-8348-A64AFFB77134}"/>
               </a:ext>
             </a:extLst>
           </p:cNvPr>
@@ -13192,7 +13392,7 @@
           <p:cNvPr id="4" name="">
             <a:extLst xmlns:a="http://schemas.openxmlformats.org/drawingml/2006/main">
               <a:ext uri="{FF2B5EF4-FFF2-40B4-BE49-F238E27FC236}">
-                <a16:creationId xmlns:a16="http://schemas.microsoft.com/office/drawing/2014/main" id="{CA0FC24E-2FBC-4FAD-AF72-21072CEBBF03}"/>
+                <a16:creationId xmlns:a16="http://schemas.microsoft.com/office/drawing/2014/main" id="{542E0912-3CCA-40AF-8115-4D10110C42B1}"/>
               </a:ext>
             </a:extLst>
           </p:cNvPr>
@@ -13249,7 +13449,7 @@
           <p:cNvPr id="5" name="">
             <a:extLst xmlns:a="http://schemas.openxmlformats.org/drawingml/2006/main">
               <a:ext uri="{FF2B5EF4-FFF2-40B4-BE49-F238E27FC236}">
-                <a16:creationId xmlns:a16="http://schemas.microsoft.com/office/drawing/2014/main" id="{83FDE9C0-42A7-40C7-976F-2855742625BC}"/>
+                <a16:creationId xmlns:a16="http://schemas.microsoft.com/office/drawing/2014/main" id="{B543CE35-B9A3-4508-958C-F5A58827A906}"/>
               </a:ext>
             </a:extLst>
           </p:cNvPr>
@@ -13306,7 +13506,7 @@
           <p:cNvPr id="6" name="">
             <a:extLst xmlns:a="http://schemas.openxmlformats.org/drawingml/2006/main">
               <a:ext uri="{FF2B5EF4-FFF2-40B4-BE49-F238E27FC236}">
-                <a16:creationId xmlns:a16="http://schemas.microsoft.com/office/drawing/2014/main" id="{0B7F357A-577B-43EB-9883-6BA749C901D1}"/>
+                <a16:creationId xmlns:a16="http://schemas.microsoft.com/office/drawing/2014/main" id="{6D8F1518-5075-4EA8-A098-AC85D5C52DDE}"/>
               </a:ext>
             </a:extLst>
           </p:cNvPr>
@@ -13363,7 +13563,7 @@
           <p:cNvPr id="7" name="">
             <a:extLst xmlns:a="http://schemas.openxmlformats.org/drawingml/2006/main">
               <a:ext uri="{FF2B5EF4-FFF2-40B4-BE49-F238E27FC236}">
-                <a16:creationId xmlns:a16="http://schemas.microsoft.com/office/drawing/2014/main" id="{6D742796-A8D3-43FA-A82E-385E84EB6E6B}"/>
+                <a16:creationId xmlns:a16="http://schemas.microsoft.com/office/drawing/2014/main" id="{1F4C0353-DB94-4AC9-9253-BC15FD93ED65}"/>
               </a:ext>
             </a:extLst>
           </p:cNvPr>
@@ -13395,7 +13595,7 @@
           <p:cNvPr id="8" name="">
             <a:extLst xmlns:a="http://schemas.openxmlformats.org/drawingml/2006/main">
               <a:ext uri="{FF2B5EF4-FFF2-40B4-BE49-F238E27FC236}">
-                <a16:creationId xmlns:a16="http://schemas.microsoft.com/office/drawing/2014/main" id="{AD052095-CD5B-4F4D-8D1D-2DB8397F77EF}"/>
+                <a16:creationId xmlns:a16="http://schemas.microsoft.com/office/drawing/2014/main" id="{755E00F1-0CAE-4712-82FD-A5F29F1C8A40}"/>
               </a:ext>
             </a:extLst>
           </p:cNvPr>
@@ -13452,7 +13652,7 @@
           <p:cNvPr id="9" name="">
             <a:extLst xmlns:a="http://schemas.openxmlformats.org/drawingml/2006/main">
               <a:ext uri="{FF2B5EF4-FFF2-40B4-BE49-F238E27FC236}">
-                <a16:creationId xmlns:a16="http://schemas.microsoft.com/office/drawing/2014/main" id="{8BD2EC7C-8F22-452C-B4BF-CE1EE9EB2059}"/>
+                <a16:creationId xmlns:a16="http://schemas.microsoft.com/office/drawing/2014/main" id="{2B714460-EB38-4B95-8808-AE241C86D4AE}"/>
               </a:ext>
             </a:extLst>
           </p:cNvPr>
@@ -13509,7 +13709,7 @@
           <p:cNvPr id="10" name="">
             <a:extLst xmlns:a="http://schemas.openxmlformats.org/drawingml/2006/main">
               <a:ext uri="{FF2B5EF4-FFF2-40B4-BE49-F238E27FC236}">
-                <a16:creationId xmlns:a16="http://schemas.microsoft.com/office/drawing/2014/main" id="{D852B2F3-7D1E-4010-8C00-2B0A1A747822}"/>
+                <a16:creationId xmlns:a16="http://schemas.microsoft.com/office/drawing/2014/main" id="{6EA878C9-8F4D-4CFB-BF31-A224D4225FF6}"/>
               </a:ext>
             </a:extLst>
           </p:cNvPr>
@@ -13543,7 +13743,7 @@
           <p:cNvPr id="11" name="">
             <a:extLst xmlns:a="http://schemas.openxmlformats.org/drawingml/2006/main">
               <a:ext uri="{FF2B5EF4-FFF2-40B4-BE49-F238E27FC236}">
-                <a16:creationId xmlns:a16="http://schemas.microsoft.com/office/drawing/2014/main" id="{B566411F-A9FF-48F7-B724-D5A25438D997}"/>
+                <a16:creationId xmlns:a16="http://schemas.microsoft.com/office/drawing/2014/main" id="{417577CE-83A4-48C7-A03B-EEB5AFD26482}"/>
               </a:ext>
             </a:extLst>
           </p:cNvPr>
@@ -13575,7 +13775,7 @@
           <p:cNvPr id="12" name="">
             <a:extLst xmlns:a="http://schemas.openxmlformats.org/drawingml/2006/main">
               <a:ext uri="{FF2B5EF4-FFF2-40B4-BE49-F238E27FC236}">
-                <a16:creationId xmlns:a16="http://schemas.microsoft.com/office/drawing/2014/main" id="{47951036-BD0B-4CA3-B8AD-91489FC65041}"/>
+                <a16:creationId xmlns:a16="http://schemas.microsoft.com/office/drawing/2014/main" id="{0A6E1483-C7E9-4F2D-8A2A-695C75E6E8EB}"/>
               </a:ext>
             </a:extLst>
           </p:cNvPr>
@@ -13632,7 +13832,7 @@
           <p:cNvPr id="13" name="">
             <a:extLst xmlns:a="http://schemas.openxmlformats.org/drawingml/2006/main">
               <a:ext uri="{FF2B5EF4-FFF2-40B4-BE49-F238E27FC236}">
-                <a16:creationId xmlns:a16="http://schemas.microsoft.com/office/drawing/2014/main" id="{E2DF702B-4E3B-4AE2-B3D8-55285F8BD9A9}"/>
+                <a16:creationId xmlns:a16="http://schemas.microsoft.com/office/drawing/2014/main" id="{803915D7-3713-4DE9-97A7-373B6D46F4B5}"/>
               </a:ext>
             </a:extLst>
           </p:cNvPr>
@@ -13689,7 +13889,7 @@
           <p:cNvPr id="14" name="">
             <a:extLst xmlns:a="http://schemas.openxmlformats.org/drawingml/2006/main">
               <a:ext uri="{FF2B5EF4-FFF2-40B4-BE49-F238E27FC236}">
-                <a16:creationId xmlns:a16="http://schemas.microsoft.com/office/drawing/2014/main" id="{C95C7629-ED0E-45DE-B08D-B702C2375138}"/>
+                <a16:creationId xmlns:a16="http://schemas.microsoft.com/office/drawing/2014/main" id="{009BCA66-6542-4FD4-A128-8D70FD0A13A2}"/>
               </a:ext>
             </a:extLst>
           </p:cNvPr>
@@ -13723,7 +13923,7 @@
           <p:cNvPr id="15" name="">
             <a:extLst xmlns:a="http://schemas.openxmlformats.org/drawingml/2006/main">
               <a:ext uri="{FF2B5EF4-FFF2-40B4-BE49-F238E27FC236}">
-                <a16:creationId xmlns:a16="http://schemas.microsoft.com/office/drawing/2014/main" id="{F2086816-3EED-44F6-827E-86451A9B5102}"/>
+                <a16:creationId xmlns:a16="http://schemas.microsoft.com/office/drawing/2014/main" id="{E8CB6DBF-ADBF-41A8-9F7B-309FFD138F17}"/>
               </a:ext>
             </a:extLst>
           </p:cNvPr>
@@ -13755,7 +13955,7 @@
           <p:cNvPr id="16" name="">
             <a:extLst xmlns:a="http://schemas.openxmlformats.org/drawingml/2006/main">
               <a:ext uri="{FF2B5EF4-FFF2-40B4-BE49-F238E27FC236}">
-                <a16:creationId xmlns:a16="http://schemas.microsoft.com/office/drawing/2014/main" id="{1529B220-1A03-4363-B549-A5CDFDA1FCC0}"/>
+                <a16:creationId xmlns:a16="http://schemas.microsoft.com/office/drawing/2014/main" id="{2E51677E-E90C-42B4-8C5B-33D148358800}"/>
               </a:ext>
             </a:extLst>
           </p:cNvPr>
@@ -13812,7 +14012,7 @@
           <p:cNvPr id="17" name="">
             <a:extLst xmlns:a="http://schemas.openxmlformats.org/drawingml/2006/main">
               <a:ext uri="{FF2B5EF4-FFF2-40B4-BE49-F238E27FC236}">
-                <a16:creationId xmlns:a16="http://schemas.microsoft.com/office/drawing/2014/main" id="{C7FB4DC3-1121-4E45-A27E-6F9AB53F3646}"/>
+                <a16:creationId xmlns:a16="http://schemas.microsoft.com/office/drawing/2014/main" id="{CDB07096-0082-4D79-98A6-52BD251A1A75}"/>
               </a:ext>
             </a:extLst>
           </p:cNvPr>
@@ -13869,7 +14069,7 @@
           <p:cNvPr id="18" name="">
             <a:extLst xmlns:a="http://schemas.openxmlformats.org/drawingml/2006/main">
               <a:ext uri="{FF2B5EF4-FFF2-40B4-BE49-F238E27FC236}">
-                <a16:creationId xmlns:a16="http://schemas.microsoft.com/office/drawing/2014/main" id="{EA2ADA0D-2E65-4965-8A53-6D95E9613560}"/>
+                <a16:creationId xmlns:a16="http://schemas.microsoft.com/office/drawing/2014/main" id="{77676FD0-7C0C-47E0-BDEF-1ACACEE42C1B}"/>
               </a:ext>
             </a:extLst>
           </p:cNvPr>
@@ -13903,7 +14103,7 @@
           <p:cNvPr id="19" name="">
             <a:extLst xmlns:a="http://schemas.openxmlformats.org/drawingml/2006/main">
               <a:ext uri="{FF2B5EF4-FFF2-40B4-BE49-F238E27FC236}">
-                <a16:creationId xmlns:a16="http://schemas.microsoft.com/office/drawing/2014/main" id="{266629C6-AA7C-40CA-9A1B-61C7849D43D2}"/>
+                <a16:creationId xmlns:a16="http://schemas.microsoft.com/office/drawing/2014/main" id="{70678205-0D4D-4A55-B663-31614B4EA591}"/>
               </a:ext>
             </a:extLst>
           </p:cNvPr>
@@ -13935,7 +14135,7 @@
           <p:cNvPr id="20" name="">
             <a:extLst xmlns:a="http://schemas.openxmlformats.org/drawingml/2006/main">
               <a:ext uri="{FF2B5EF4-FFF2-40B4-BE49-F238E27FC236}">
-                <a16:creationId xmlns:a16="http://schemas.microsoft.com/office/drawing/2014/main" id="{9912CCCB-A6F8-4A02-85B0-6D28E2DCD067}"/>
+                <a16:creationId xmlns:a16="http://schemas.microsoft.com/office/drawing/2014/main" id="{B50D71E0-4130-417A-BA10-5DB3D607E1DA}"/>
               </a:ext>
             </a:extLst>
           </p:cNvPr>
@@ -13992,7 +14192,7 @@
           <p:cNvPr id="21" name="">
             <a:extLst xmlns:a="http://schemas.openxmlformats.org/drawingml/2006/main">
               <a:ext uri="{FF2B5EF4-FFF2-40B4-BE49-F238E27FC236}">
-                <a16:creationId xmlns:a16="http://schemas.microsoft.com/office/drawing/2014/main" id="{9CEAE05D-814B-4258-85B6-D711ABD5C800}"/>
+                <a16:creationId xmlns:a16="http://schemas.microsoft.com/office/drawing/2014/main" id="{FB9DE432-7B06-45FD-A6AE-8FC4CD43F1CD}"/>
               </a:ext>
             </a:extLst>
           </p:cNvPr>
@@ -14047,7 +14247,7 @@
     </p:spTree>
     <p:extLst>
       <p:ext uri="{BB962C8B-B14F-4D97-AF65-F5344CB8AC3E}">
-        <p14:creationId xmlns:p14="http://schemas.microsoft.com/office/powerpoint/2010/main" val="2128272359"/>
+        <p14:creationId xmlns:p14="http://schemas.microsoft.com/office/powerpoint/2010/main" val="1381381559"/>
       </p:ext>
     </p:extLst>
   </p:cSld>
